--- a/Photostim_Updates.pptx
+++ b/Photostim_Updates.pptx
@@ -14,27 +14,28 @@
     <p:sldId id="262" r:id="rId8"/>
     <p:sldId id="267" r:id="rId9"/>
     <p:sldId id="263" r:id="rId10"/>
-    <p:sldId id="264" r:id="rId11"/>
-    <p:sldId id="265" r:id="rId12"/>
-    <p:sldId id="269" r:id="rId13"/>
-    <p:sldId id="266" r:id="rId14"/>
-    <p:sldId id="268" r:id="rId15"/>
-    <p:sldId id="270" r:id="rId16"/>
-    <p:sldId id="271" r:id="rId17"/>
-    <p:sldId id="272" r:id="rId18"/>
-    <p:sldId id="273" r:id="rId19"/>
-    <p:sldId id="277" r:id="rId20"/>
-    <p:sldId id="279" r:id="rId21"/>
-    <p:sldId id="280" r:id="rId22"/>
-    <p:sldId id="276" r:id="rId23"/>
-    <p:sldId id="275" r:id="rId24"/>
-    <p:sldId id="282" r:id="rId25"/>
-    <p:sldId id="281" r:id="rId26"/>
-    <p:sldId id="274" r:id="rId27"/>
-    <p:sldId id="283" r:id="rId28"/>
-    <p:sldId id="284" r:id="rId29"/>
-    <p:sldId id="286" r:id="rId30"/>
-    <p:sldId id="287" r:id="rId31"/>
+    <p:sldId id="288" r:id="rId11"/>
+    <p:sldId id="264" r:id="rId12"/>
+    <p:sldId id="265" r:id="rId13"/>
+    <p:sldId id="269" r:id="rId14"/>
+    <p:sldId id="266" r:id="rId15"/>
+    <p:sldId id="268" r:id="rId16"/>
+    <p:sldId id="270" r:id="rId17"/>
+    <p:sldId id="271" r:id="rId18"/>
+    <p:sldId id="272" r:id="rId19"/>
+    <p:sldId id="273" r:id="rId20"/>
+    <p:sldId id="277" r:id="rId21"/>
+    <p:sldId id="279" r:id="rId22"/>
+    <p:sldId id="280" r:id="rId23"/>
+    <p:sldId id="276" r:id="rId24"/>
+    <p:sldId id="275" r:id="rId25"/>
+    <p:sldId id="282" r:id="rId26"/>
+    <p:sldId id="281" r:id="rId27"/>
+    <p:sldId id="274" r:id="rId28"/>
+    <p:sldId id="283" r:id="rId29"/>
+    <p:sldId id="284" r:id="rId30"/>
+    <p:sldId id="286" r:id="rId31"/>
+    <p:sldId id="287" r:id="rId32"/>
   </p:sldIdLst>
   <p:sldSz cx="9144000" cy="6858000" type="screen4x3"/>
   <p:notesSz cx="6858000" cy="9144000"/>
@@ -2967,7 +2968,7 @@
           <p:cNvPr id="3" name="Picture 2">
             <a:extLst>
               <a:ext uri="{FF2B5EF4-FFF2-40B4-BE49-F238E27FC236}">
-                <a16:creationId xmlns:a16="http://schemas.microsoft.com/office/drawing/2014/main" id="{748F2095-D79A-322F-8B44-720C8024BEFD}"/>
+                <a16:creationId xmlns:a16="http://schemas.microsoft.com/office/drawing/2014/main" id="{02CF9DB0-0C13-FB4C-1B37-D03AE33C6846}"/>
               </a:ext>
             </a:extLst>
           </p:cNvPr>
@@ -2984,8 +2985,8 @@
         </p:blipFill>
         <p:spPr>
           <a:xfrm>
-            <a:off x="2891603" y="466825"/>
-            <a:ext cx="5840728" cy="3179871"/>
+            <a:off x="128016" y="264461"/>
+            <a:ext cx="6346469" cy="3237691"/>
           </a:xfrm>
           <a:prstGeom prst="rect">
             <a:avLst/>
@@ -2997,7 +2998,7 @@
           <p:cNvPr id="5" name="Picture 4">
             <a:extLst>
               <a:ext uri="{FF2B5EF4-FFF2-40B4-BE49-F238E27FC236}">
-                <a16:creationId xmlns:a16="http://schemas.microsoft.com/office/drawing/2014/main" id="{740B17A4-5F42-8AB0-B953-17FA74177459}"/>
+                <a16:creationId xmlns:a16="http://schemas.microsoft.com/office/drawing/2014/main" id="{B78554F3-89FB-B685-92A2-7DC8735E5541}"/>
               </a:ext>
             </a:extLst>
           </p:cNvPr>
@@ -3014,56 +3015,18 @@
         </p:blipFill>
         <p:spPr>
           <a:xfrm>
-            <a:off x="251461" y="3646696"/>
-            <a:ext cx="5840729" cy="3179871"/>
+            <a:off x="466344" y="3502152"/>
+            <a:ext cx="5925312" cy="3245277"/>
           </a:xfrm>
           <a:prstGeom prst="rect">
             <a:avLst/>
           </a:prstGeom>
         </p:spPr>
       </p:pic>
-      <p:sp>
-        <p:nvSpPr>
-          <p:cNvPr id="6" name="TextBox 5">
-            <a:extLst>
-              <a:ext uri="{FF2B5EF4-FFF2-40B4-BE49-F238E27FC236}">
-                <a16:creationId xmlns:a16="http://schemas.microsoft.com/office/drawing/2014/main" id="{51096EDC-8E60-83DD-6548-5D3069F677C7}"/>
-              </a:ext>
-            </a:extLst>
-          </p:cNvPr>
-          <p:cNvSpPr txBox="1"/>
-          <p:nvPr/>
-        </p:nvSpPr>
-        <p:spPr>
-          <a:xfrm>
-            <a:off x="281758" y="320735"/>
-            <a:ext cx="5744137" cy="461665"/>
-          </a:xfrm>
-          <a:prstGeom prst="rect">
-            <a:avLst/>
-          </a:prstGeom>
-          <a:noFill/>
-        </p:spPr>
-        <p:txBody>
-          <a:bodyPr wrap="square">
-            <a:spAutoFit/>
-          </a:bodyPr>
-          <a:lstStyle/>
-          <a:p>
-            <a:r>
-              <a:rPr lang="en-US" sz="2400" b="1" dirty="0">
-                <a:latin typeface="Arial" panose="020B0604020202020204" pitchFamily="34" charset="0"/>
-                <a:cs typeface="Arial" panose="020B0604020202020204" pitchFamily="34" charset="0"/>
-              </a:rPr>
-              <a:t>TPR/FPR Full Rank vs Low Rank</a:t>
-            </a:r>
-          </a:p>
-        </p:txBody>
-      </p:sp>
     </p:spTree>
     <p:extLst>
       <p:ext uri="{BB962C8B-B14F-4D97-AF65-F5344CB8AC3E}">
-        <p14:creationId xmlns:p14="http://schemas.microsoft.com/office/powerpoint/2010/main" val="335937288"/>
+        <p14:creationId xmlns:p14="http://schemas.microsoft.com/office/powerpoint/2010/main" val="2810709927"/>
       </p:ext>
     </p:extLst>
   </p:cSld>
@@ -3090,50 +3053,12 @@
           <a:chExt cx="0" cy="0"/>
         </a:xfrm>
       </p:grpSpPr>
-      <p:sp>
-        <p:nvSpPr>
-          <p:cNvPr id="6" name="TextBox 5">
-            <a:extLst>
-              <a:ext uri="{FF2B5EF4-FFF2-40B4-BE49-F238E27FC236}">
-                <a16:creationId xmlns:a16="http://schemas.microsoft.com/office/drawing/2014/main" id="{51096EDC-8E60-83DD-6548-5D3069F677C7}"/>
-              </a:ext>
-            </a:extLst>
-          </p:cNvPr>
-          <p:cNvSpPr txBox="1"/>
-          <p:nvPr/>
-        </p:nvSpPr>
-        <p:spPr>
-          <a:xfrm>
-            <a:off x="281758" y="320735"/>
-            <a:ext cx="5744137" cy="461665"/>
-          </a:xfrm>
-          <a:prstGeom prst="rect">
-            <a:avLst/>
-          </a:prstGeom>
-          <a:noFill/>
-        </p:spPr>
-        <p:txBody>
-          <a:bodyPr wrap="square">
-            <a:spAutoFit/>
-          </a:bodyPr>
-          <a:lstStyle/>
-          <a:p>
-            <a:r>
-              <a:rPr lang="en-US" sz="2400" b="1" dirty="0">
-                <a:latin typeface="Arial" panose="020B0604020202020204" pitchFamily="34" charset="0"/>
-                <a:cs typeface="Arial" panose="020B0604020202020204" pitchFamily="34" charset="0"/>
-              </a:rPr>
-              <a:t>AUROC for Full Rank and Low Rank</a:t>
-            </a:r>
-          </a:p>
-        </p:txBody>
-      </p:sp>
       <p:pic>
         <p:nvPicPr>
-          <p:cNvPr id="4" name="Picture 3">
+          <p:cNvPr id="3" name="Picture 2">
             <a:extLst>
               <a:ext uri="{FF2B5EF4-FFF2-40B4-BE49-F238E27FC236}">
-                <a16:creationId xmlns:a16="http://schemas.microsoft.com/office/drawing/2014/main" id="{BCD1F5DD-8A4A-6E06-69A5-38A515515D43}"/>
+                <a16:creationId xmlns:a16="http://schemas.microsoft.com/office/drawing/2014/main" id="{748F2095-D79A-322F-8B44-720C8024BEFD}"/>
               </a:ext>
             </a:extLst>
           </p:cNvPr>
@@ -3150,8 +3075,8 @@
         </p:blipFill>
         <p:spPr>
           <a:xfrm>
-            <a:off x="187483" y="801398"/>
-            <a:ext cx="5436273" cy="2931848"/>
+            <a:off x="2891603" y="466825"/>
+            <a:ext cx="5840728" cy="3179871"/>
           </a:xfrm>
           <a:prstGeom prst="rect">
             <a:avLst/>
@@ -3160,10 +3085,10 @@
       </p:pic>
       <p:pic>
         <p:nvPicPr>
-          <p:cNvPr id="8" name="Picture 7">
+          <p:cNvPr id="5" name="Picture 4">
             <a:extLst>
               <a:ext uri="{FF2B5EF4-FFF2-40B4-BE49-F238E27FC236}">
-                <a16:creationId xmlns:a16="http://schemas.microsoft.com/office/drawing/2014/main" id="{CBC153EA-9794-51D2-C5AF-931C57C7B254}"/>
+                <a16:creationId xmlns:a16="http://schemas.microsoft.com/office/drawing/2014/main" id="{740B17A4-5F42-8AB0-B953-17FA74177459}"/>
               </a:ext>
             </a:extLst>
           </p:cNvPr>
@@ -3180,8 +3105,8 @@
         </p:blipFill>
         <p:spPr>
           <a:xfrm>
-            <a:off x="725364" y="3733246"/>
-            <a:ext cx="5744137" cy="3124754"/>
+            <a:off x="251461" y="3646696"/>
+            <a:ext cx="5840729" cy="3179871"/>
           </a:xfrm>
           <a:prstGeom prst="rect">
             <a:avLst/>
@@ -3190,10 +3115,10 @@
       </p:pic>
       <p:sp>
         <p:nvSpPr>
-          <p:cNvPr id="9" name="TextBox 8">
+          <p:cNvPr id="6" name="TextBox 5">
             <a:extLst>
               <a:ext uri="{FF2B5EF4-FFF2-40B4-BE49-F238E27FC236}">
-                <a16:creationId xmlns:a16="http://schemas.microsoft.com/office/drawing/2014/main" id="{474C41D2-1298-8DB3-A80B-1BD093556556}"/>
+                <a16:creationId xmlns:a16="http://schemas.microsoft.com/office/drawing/2014/main" id="{51096EDC-8E60-83DD-6548-5D3069F677C7}"/>
               </a:ext>
             </a:extLst>
           </p:cNvPr>
@@ -3202,8 +3127,8 @@
         </p:nvSpPr>
         <p:spPr>
           <a:xfrm>
-            <a:off x="5802976" y="977768"/>
-            <a:ext cx="3422480" cy="1569660"/>
+            <a:off x="281758" y="320735"/>
+            <a:ext cx="5744137" cy="461665"/>
           </a:xfrm>
           <a:prstGeom prst="rect">
             <a:avLst/>
@@ -3211,55 +3136,17 @@
           <a:noFill/>
         </p:spPr>
         <p:txBody>
-          <a:bodyPr wrap="square" rtlCol="0">
+          <a:bodyPr wrap="square">
             <a:spAutoFit/>
           </a:bodyPr>
           <a:lstStyle/>
           <a:p>
             <a:r>
-              <a:rPr lang="en-US" sz="1200" dirty="0">
-                <a:solidFill>
-                  <a:srgbClr val="000000"/>
-                </a:solidFill>
-              </a:rPr>
-              <a:t>Lambdas = 0, 1e-5, 1e-6, 1e-7</a:t>
-            </a:r>
-          </a:p>
-          <a:p>
-            <a:r>
-              <a:rPr lang="en-US" sz="1200" dirty="0">
-                <a:solidFill>
-                  <a:srgbClr val="000000"/>
-                </a:solidFill>
-              </a:rPr>
-              <a:t>AUROC low rank 35 = 0.765, 0.722, 0.791, 0.777 AUROC full rank = 0.717, 0.736, 0.775, 0.722</a:t>
-            </a:r>
-          </a:p>
-          <a:p>
-            <a:endParaRPr lang="en-US" sz="1200" dirty="0">
-              <a:solidFill>
-                <a:srgbClr val="000000"/>
-              </a:solidFill>
-            </a:endParaRPr>
-          </a:p>
-          <a:p>
-            <a:r>
-              <a:rPr lang="en-US" sz="1200" dirty="0">
-                <a:solidFill>
-                  <a:srgbClr val="000000"/>
-                </a:solidFill>
-              </a:rPr>
-              <a:t>AUROC_noninput low rank 35 = 0.644, 0.607, 0.663, 0.649 </a:t>
-            </a:r>
-          </a:p>
-          <a:p>
-            <a:r>
-              <a:rPr lang="en-US" sz="1200" dirty="0">
-                <a:solidFill>
-                  <a:srgbClr val="000000"/>
-                </a:solidFill>
-              </a:rPr>
-              <a:t>AUROC_noninput full rank = 0.611, 0.621, 0.648, 0.619</a:t>
+              <a:rPr lang="en-US" sz="2400" b="1" dirty="0">
+                <a:latin typeface="Arial" panose="020B0604020202020204" pitchFamily="34" charset="0"/>
+                <a:cs typeface="Arial" panose="020B0604020202020204" pitchFamily="34" charset="0"/>
+              </a:rPr>
+              <a:t>TPR/FPR Full Rank vs Low Rank</a:t>
             </a:r>
           </a:p>
         </p:txBody>
@@ -3267,7 +3154,7 @@
     </p:spTree>
     <p:extLst>
       <p:ext uri="{BB962C8B-B14F-4D97-AF65-F5344CB8AC3E}">
-        <p14:creationId xmlns:p14="http://schemas.microsoft.com/office/powerpoint/2010/main" val="586623750"/>
+        <p14:creationId xmlns:p14="http://schemas.microsoft.com/office/powerpoint/2010/main" val="335937288"/>
       </p:ext>
     </p:extLst>
   </p:cSld>
@@ -3296,10 +3183,10 @@
       </p:grpSpPr>
       <p:sp>
         <p:nvSpPr>
-          <p:cNvPr id="3" name="TextBox 2">
+          <p:cNvPr id="6" name="TextBox 5">
             <a:extLst>
               <a:ext uri="{FF2B5EF4-FFF2-40B4-BE49-F238E27FC236}">
-                <a16:creationId xmlns:a16="http://schemas.microsoft.com/office/drawing/2014/main" id="{D289D14C-14AD-7133-944C-7EDF3ACD9994}"/>
+                <a16:creationId xmlns:a16="http://schemas.microsoft.com/office/drawing/2014/main" id="{51096EDC-8E60-83DD-6548-5D3069F677C7}"/>
               </a:ext>
             </a:extLst>
           </p:cNvPr>
@@ -3327,17 +3214,17 @@
                 <a:latin typeface="Arial" panose="020B0604020202020204" pitchFamily="34" charset="0"/>
                 <a:cs typeface="Arial" panose="020B0604020202020204" pitchFamily="34" charset="0"/>
               </a:rPr>
-              <a:t>Neuron Sensitivity</a:t>
+              <a:t>AUROC for Full Rank and Low Rank</a:t>
             </a:r>
           </a:p>
         </p:txBody>
       </p:sp>
       <p:pic>
         <p:nvPicPr>
-          <p:cNvPr id="5" name="Picture 4">
+          <p:cNvPr id="4" name="Picture 3">
             <a:extLst>
               <a:ext uri="{FF2B5EF4-FFF2-40B4-BE49-F238E27FC236}">
-                <a16:creationId xmlns:a16="http://schemas.microsoft.com/office/drawing/2014/main" id="{984C56F3-815F-0098-DF49-3610A3D3A151}"/>
+                <a16:creationId xmlns:a16="http://schemas.microsoft.com/office/drawing/2014/main" id="{BCD1F5DD-8A4A-6E06-69A5-38A515515D43}"/>
               </a:ext>
             </a:extLst>
           </p:cNvPr>
@@ -3354,8 +3241,8 @@
         </p:blipFill>
         <p:spPr>
           <a:xfrm>
-            <a:off x="694944" y="782400"/>
-            <a:ext cx="5980176" cy="2964962"/>
+            <a:off x="187483" y="801398"/>
+            <a:ext cx="5436273" cy="2931848"/>
           </a:xfrm>
           <a:prstGeom prst="rect">
             <a:avLst/>
@@ -3364,10 +3251,10 @@
       </p:pic>
       <p:pic>
         <p:nvPicPr>
-          <p:cNvPr id="9" name="Picture 8">
+          <p:cNvPr id="8" name="Picture 7">
             <a:extLst>
               <a:ext uri="{FF2B5EF4-FFF2-40B4-BE49-F238E27FC236}">
-                <a16:creationId xmlns:a16="http://schemas.microsoft.com/office/drawing/2014/main" id="{93B93AAF-7D16-279C-4805-003941F72E74}"/>
+                <a16:creationId xmlns:a16="http://schemas.microsoft.com/office/drawing/2014/main" id="{CBC153EA-9794-51D2-C5AF-931C57C7B254}"/>
               </a:ext>
             </a:extLst>
           </p:cNvPr>
@@ -3384,18 +3271,94 @@
         </p:blipFill>
         <p:spPr>
           <a:xfrm>
-            <a:off x="694944" y="3877056"/>
-            <a:ext cx="5980176" cy="2964961"/>
+            <a:off x="725364" y="3733246"/>
+            <a:ext cx="5744137" cy="3124754"/>
           </a:xfrm>
           <a:prstGeom prst="rect">
             <a:avLst/>
           </a:prstGeom>
         </p:spPr>
       </p:pic>
+      <p:sp>
+        <p:nvSpPr>
+          <p:cNvPr id="9" name="TextBox 8">
+            <a:extLst>
+              <a:ext uri="{FF2B5EF4-FFF2-40B4-BE49-F238E27FC236}">
+                <a16:creationId xmlns:a16="http://schemas.microsoft.com/office/drawing/2014/main" id="{474C41D2-1298-8DB3-A80B-1BD093556556}"/>
+              </a:ext>
+            </a:extLst>
+          </p:cNvPr>
+          <p:cNvSpPr txBox="1"/>
+          <p:nvPr/>
+        </p:nvSpPr>
+        <p:spPr>
+          <a:xfrm>
+            <a:off x="5802976" y="977768"/>
+            <a:ext cx="3422480" cy="1569660"/>
+          </a:xfrm>
+          <a:prstGeom prst="rect">
+            <a:avLst/>
+          </a:prstGeom>
+          <a:noFill/>
+        </p:spPr>
+        <p:txBody>
+          <a:bodyPr wrap="square" rtlCol="0">
+            <a:spAutoFit/>
+          </a:bodyPr>
+          <a:lstStyle/>
+          <a:p>
+            <a:r>
+              <a:rPr lang="en-US" sz="1200" dirty="0">
+                <a:solidFill>
+                  <a:srgbClr val="000000"/>
+                </a:solidFill>
+              </a:rPr>
+              <a:t>Lambdas = 0, 1e-5, 1e-6, 1e-7</a:t>
+            </a:r>
+          </a:p>
+          <a:p>
+            <a:r>
+              <a:rPr lang="en-US" sz="1200" dirty="0">
+                <a:solidFill>
+                  <a:srgbClr val="000000"/>
+                </a:solidFill>
+              </a:rPr>
+              <a:t>AUROC low rank 35 = 0.765, 0.722, 0.791, 0.777 AUROC full rank = 0.717, 0.736, 0.775, 0.722</a:t>
+            </a:r>
+          </a:p>
+          <a:p>
+            <a:endParaRPr lang="en-US" sz="1200" dirty="0">
+              <a:solidFill>
+                <a:srgbClr val="000000"/>
+              </a:solidFill>
+            </a:endParaRPr>
+          </a:p>
+          <a:p>
+            <a:r>
+              <a:rPr lang="en-US" sz="1200" dirty="0">
+                <a:solidFill>
+                  <a:srgbClr val="000000"/>
+                </a:solidFill>
+              </a:rPr>
+              <a:t>AUROC_noninput low rank 35 = 0.644, 0.607, 0.663, 0.649 </a:t>
+            </a:r>
+          </a:p>
+          <a:p>
+            <a:r>
+              <a:rPr lang="en-US" sz="1200" dirty="0">
+                <a:solidFill>
+                  <a:srgbClr val="000000"/>
+                </a:solidFill>
+              </a:rPr>
+              <a:t>AUROC_noninput full rank = 0.611, 0.621, 0.648, 0.619</a:t>
+            </a:r>
+          </a:p>
+        </p:txBody>
+      </p:sp>
     </p:spTree>
     <p:extLst>
       <p:ext uri="{BB962C8B-B14F-4D97-AF65-F5344CB8AC3E}">
-        <p14:creationId xmlns:p14="http://schemas.microsoft.com/office/powerpoint/2010/main" val="641904487"/>
+        <p14:creationId xmlns:p14="http://schemas.microsoft.com/office/powerpoint/2010/main" val="586623750"/>
       </p:ext>
     </p:extLst>
   </p:cSld>
@@ -3462,10 +3425,10 @@
       </p:sp>
       <p:pic>
         <p:nvPicPr>
-          <p:cNvPr id="4" name="Picture 3">
+          <p:cNvPr id="5" name="Picture 4">
             <a:extLst>
               <a:ext uri="{FF2B5EF4-FFF2-40B4-BE49-F238E27FC236}">
-                <a16:creationId xmlns:a16="http://schemas.microsoft.com/office/drawing/2014/main" id="{F6D4ED1B-3C97-019E-2724-EC7C4D97F756}"/>
+                <a16:creationId xmlns:a16="http://schemas.microsoft.com/office/drawing/2014/main" id="{984C56F3-815F-0098-DF49-3610A3D3A151}"/>
               </a:ext>
             </a:extLst>
           </p:cNvPr>
@@ -3482,8 +3445,8 @@
         </p:blipFill>
         <p:spPr>
           <a:xfrm>
-            <a:off x="281758" y="876287"/>
-            <a:ext cx="5744137" cy="2847934"/>
+            <a:off x="694944" y="782400"/>
+            <a:ext cx="5980176" cy="2964962"/>
           </a:xfrm>
           <a:prstGeom prst="rect">
             <a:avLst/>
@@ -3492,10 +3455,10 @@
       </p:pic>
       <p:pic>
         <p:nvPicPr>
-          <p:cNvPr id="7" name="Picture 6">
+          <p:cNvPr id="9" name="Picture 8">
             <a:extLst>
               <a:ext uri="{FF2B5EF4-FFF2-40B4-BE49-F238E27FC236}">
-                <a16:creationId xmlns:a16="http://schemas.microsoft.com/office/drawing/2014/main" id="{AC3E2C7C-8105-9716-B8C9-CEA2333F6FA1}"/>
+                <a16:creationId xmlns:a16="http://schemas.microsoft.com/office/drawing/2014/main" id="{93B93AAF-7D16-279C-4805-003941F72E74}"/>
               </a:ext>
             </a:extLst>
           </p:cNvPr>
@@ -3512,8 +3475,8 @@
         </p:blipFill>
         <p:spPr>
           <a:xfrm>
-            <a:off x="347473" y="3758180"/>
-            <a:ext cx="5605272" cy="2779085"/>
+            <a:off x="694944" y="3877056"/>
+            <a:ext cx="5980176" cy="2964961"/>
           </a:xfrm>
           <a:prstGeom prst="rect">
             <a:avLst/>
@@ -3523,7 +3486,7 @@
     </p:spTree>
     <p:extLst>
       <p:ext uri="{BB962C8B-B14F-4D97-AF65-F5344CB8AC3E}">
-        <p14:creationId xmlns:p14="http://schemas.microsoft.com/office/powerpoint/2010/main" val="4114430426"/>
+        <p14:creationId xmlns:p14="http://schemas.microsoft.com/office/powerpoint/2010/main" val="641904487"/>
       </p:ext>
     </p:extLst>
   </p:cSld>
@@ -3579,278 +3542,79 @@
           <a:lstStyle/>
           <a:p>
             <a:r>
-              <a:rPr lang="en-US" sz="2400" b="1" dirty="0" err="1">
-                <a:latin typeface="Arial" panose="020B0604020202020204" pitchFamily="34" charset="0"/>
-                <a:cs typeface="Arial" panose="020B0604020202020204" pitchFamily="34" charset="0"/>
-              </a:rPr>
-              <a:t>Ark_order</a:t>
-            </a:r>
-            <a:r>
               <a:rPr lang="en-US" sz="2400" b="1" dirty="0">
                 <a:latin typeface="Arial" panose="020B0604020202020204" pitchFamily="34" charset="0"/>
                 <a:cs typeface="Arial" panose="020B0604020202020204" pitchFamily="34" charset="0"/>
               </a:rPr>
-              <a:t> tuning</a:t>
+              <a:t>Neuron Sensitivity</a:t>
             </a:r>
           </a:p>
         </p:txBody>
       </p:sp>
-      <p:sp>
-        <p:nvSpPr>
-          <p:cNvPr id="2" name="TextBox 1">
+      <p:pic>
+        <p:nvPicPr>
+          <p:cNvPr id="4" name="Picture 3">
             <a:extLst>
               <a:ext uri="{FF2B5EF4-FFF2-40B4-BE49-F238E27FC236}">
-                <a16:creationId xmlns:a16="http://schemas.microsoft.com/office/drawing/2014/main" id="{451E625E-14BE-18C0-785E-5B8814C0909D}"/>
+                <a16:creationId xmlns:a16="http://schemas.microsoft.com/office/drawing/2014/main" id="{F6D4ED1B-3C97-019E-2724-EC7C4D97F756}"/>
               </a:ext>
             </a:extLst>
           </p:cNvPr>
-          <p:cNvSpPr txBox="1"/>
+          <p:cNvPicPr>
+            <a:picLocks noChangeAspect="1"/>
+          </p:cNvPicPr>
           <p:nvPr/>
-        </p:nvSpPr>
-        <p:spPr>
-          <a:xfrm>
-            <a:off x="773510" y="1628507"/>
-            <a:ext cx="7777779" cy="3600986"/>
-          </a:xfrm>
-          <a:prstGeom prst="rect">
-            <a:avLst/>
-          </a:prstGeom>
-          <a:noFill/>
-        </p:spPr>
-        <p:txBody>
-          <a:bodyPr wrap="square" rtlCol="0">
-            <a:spAutoFit/>
-          </a:bodyPr>
-          <a:lstStyle/>
-          <a:p>
-            <a:r>
-              <a:rPr lang="en-US" sz="1200" u="sng" dirty="0">
-                <a:latin typeface="Arial" panose="020B0604020202020204" pitchFamily="34" charset="0"/>
-                <a:cs typeface="Arial" panose="020B0604020202020204" pitchFamily="34" charset="0"/>
-              </a:rPr>
-              <a:t>Low rank 35, lambda=0, k=4</a:t>
-            </a:r>
-          </a:p>
-          <a:p>
-            <a:pPr marL="628650" lvl="1" indent="-171450">
-              <a:buFont typeface="Arial" panose="020B0604020202020204" pitchFamily="34" charset="0"/>
-              <a:buChar char="•"/>
-            </a:pPr>
-            <a:r>
-              <a:rPr lang="en-US" sz="1200" dirty="0">
-                <a:latin typeface="Arial" panose="020B0604020202020204" pitchFamily="34" charset="0"/>
-                <a:cs typeface="Arial" panose="020B0604020202020204" pitchFamily="34" charset="0"/>
-                <a:sym typeface="Wingdings" panose="05000000000000000000" pitchFamily="2" charset="2"/>
-              </a:rPr>
-              <a:t>MSE = 0.000552</a:t>
-            </a:r>
-          </a:p>
-          <a:p>
-            <a:pPr marL="628650" lvl="1" indent="-171450">
-              <a:buFont typeface="Arial" panose="020B0604020202020204" pitchFamily="34" charset="0"/>
-              <a:buChar char="•"/>
-            </a:pPr>
-            <a:r>
-              <a:rPr lang="en-US" sz="1200" dirty="0">
-                <a:latin typeface="Arial" panose="020B0604020202020204" pitchFamily="34" charset="0"/>
-                <a:cs typeface="Arial" panose="020B0604020202020204" pitchFamily="34" charset="0"/>
-                <a:sym typeface="Wingdings" panose="05000000000000000000" pitchFamily="2" charset="2"/>
-              </a:rPr>
-              <a:t>AUROC = 0.765</a:t>
-            </a:r>
-          </a:p>
-          <a:p>
-            <a:endParaRPr lang="en-US" sz="1200" u="sng" dirty="0">
-              <a:latin typeface="Arial" panose="020B0604020202020204" pitchFamily="34" charset="0"/>
-              <a:cs typeface="Arial" panose="020B0604020202020204" pitchFamily="34" charset="0"/>
-            </a:endParaRPr>
-          </a:p>
-          <a:p>
-            <a:r>
-              <a:rPr lang="en-US" sz="1200" u="sng" dirty="0">
-                <a:latin typeface="Arial" panose="020B0604020202020204" pitchFamily="34" charset="0"/>
-                <a:cs typeface="Arial" panose="020B0604020202020204" pitchFamily="34" charset="0"/>
-              </a:rPr>
-              <a:t>Full rank, lambda=0, k=4</a:t>
-            </a:r>
-          </a:p>
-          <a:p>
-            <a:pPr marL="628650" lvl="1" indent="-171450">
-              <a:buFont typeface="Arial" panose="020B0604020202020204" pitchFamily="34" charset="0"/>
-              <a:buChar char="•"/>
-            </a:pPr>
-            <a:r>
-              <a:rPr lang="en-US" sz="1200" dirty="0">
-                <a:latin typeface="Arial" panose="020B0604020202020204" pitchFamily="34" charset="0"/>
-                <a:cs typeface="Arial" panose="020B0604020202020204" pitchFamily="34" charset="0"/>
-                <a:sym typeface="Wingdings" panose="05000000000000000000" pitchFamily="2" charset="2"/>
-              </a:rPr>
-              <a:t>MSE = 0.000322</a:t>
-            </a:r>
-          </a:p>
-          <a:p>
-            <a:pPr marL="628650" lvl="1" indent="-171450">
-              <a:buFont typeface="Arial" panose="020B0604020202020204" pitchFamily="34" charset="0"/>
-              <a:buChar char="•"/>
-            </a:pPr>
-            <a:r>
-              <a:rPr lang="en-US" sz="1200" dirty="0">
-                <a:latin typeface="Arial" panose="020B0604020202020204" pitchFamily="34" charset="0"/>
-                <a:cs typeface="Arial" panose="020B0604020202020204" pitchFamily="34" charset="0"/>
-                <a:sym typeface="Wingdings" panose="05000000000000000000" pitchFamily="2" charset="2"/>
-              </a:rPr>
-              <a:t>AUROC = 0.717</a:t>
-            </a:r>
-          </a:p>
-          <a:p>
-            <a:pPr lvl="1"/>
-            <a:endParaRPr lang="en-US" sz="1200" dirty="0">
-              <a:latin typeface="Arial" panose="020B0604020202020204" pitchFamily="34" charset="0"/>
-              <a:cs typeface="Arial" panose="020B0604020202020204" pitchFamily="34" charset="0"/>
-              <a:sym typeface="Wingdings" panose="05000000000000000000" pitchFamily="2" charset="2"/>
-            </a:endParaRPr>
-          </a:p>
-          <a:p>
-            <a:r>
-              <a:rPr lang="en-US" sz="1200" u="sng" dirty="0">
-                <a:latin typeface="Arial" panose="020B0604020202020204" pitchFamily="34" charset="0"/>
-                <a:cs typeface="Arial" panose="020B0604020202020204" pitchFamily="34" charset="0"/>
-              </a:rPr>
-              <a:t>Low rank 35, lambda=0, k=7</a:t>
-            </a:r>
-          </a:p>
-          <a:p>
-            <a:pPr marL="628650" lvl="1" indent="-171450">
-              <a:buFont typeface="Arial" panose="020B0604020202020204" pitchFamily="34" charset="0"/>
-              <a:buChar char="•"/>
-            </a:pPr>
-            <a:r>
-              <a:rPr lang="en-US" sz="1200" dirty="0">
-                <a:latin typeface="Arial" panose="020B0604020202020204" pitchFamily="34" charset="0"/>
-                <a:cs typeface="Arial" panose="020B0604020202020204" pitchFamily="34" charset="0"/>
-                <a:sym typeface="Wingdings" panose="05000000000000000000" pitchFamily="2" charset="2"/>
-              </a:rPr>
-              <a:t>MSE = 0.00928</a:t>
-            </a:r>
-          </a:p>
-          <a:p>
-            <a:pPr marL="628650" lvl="1" indent="-171450">
-              <a:buFont typeface="Arial" panose="020B0604020202020204" pitchFamily="34" charset="0"/>
-              <a:buChar char="•"/>
-            </a:pPr>
-            <a:r>
-              <a:rPr lang="en-US" sz="1200" dirty="0">
-                <a:latin typeface="Arial" panose="020B0604020202020204" pitchFamily="34" charset="0"/>
-                <a:cs typeface="Arial" panose="020B0604020202020204" pitchFamily="34" charset="0"/>
-                <a:sym typeface="Wingdings" panose="05000000000000000000" pitchFamily="2" charset="2"/>
-              </a:rPr>
-              <a:t>AUROC = 0.712</a:t>
-            </a:r>
-          </a:p>
-          <a:p>
-            <a:pPr lvl="1"/>
-            <a:endParaRPr lang="en-US" sz="1200" dirty="0">
-              <a:latin typeface="Arial" panose="020B0604020202020204" pitchFamily="34" charset="0"/>
-              <a:cs typeface="Arial" panose="020B0604020202020204" pitchFamily="34" charset="0"/>
-              <a:sym typeface="Wingdings" panose="05000000000000000000" pitchFamily="2" charset="2"/>
-            </a:endParaRPr>
-          </a:p>
-          <a:p>
-            <a:r>
-              <a:rPr lang="en-US" sz="1200" u="sng" dirty="0">
-                <a:latin typeface="Arial" panose="020B0604020202020204" pitchFamily="34" charset="0"/>
-                <a:cs typeface="Arial" panose="020B0604020202020204" pitchFamily="34" charset="0"/>
-              </a:rPr>
-              <a:t>Full rank, lambda=0, k=7</a:t>
-            </a:r>
-          </a:p>
-          <a:p>
-            <a:pPr marL="628650" lvl="1" indent="-171450">
-              <a:buFont typeface="Arial" panose="020B0604020202020204" pitchFamily="34" charset="0"/>
-              <a:buChar char="•"/>
-            </a:pPr>
-            <a:r>
-              <a:rPr lang="en-US" sz="1200" dirty="0">
-                <a:latin typeface="Arial" panose="020B0604020202020204" pitchFamily="34" charset="0"/>
-                <a:cs typeface="Arial" panose="020B0604020202020204" pitchFamily="34" charset="0"/>
-                <a:sym typeface="Wingdings" panose="05000000000000000000" pitchFamily="2" charset="2"/>
-              </a:rPr>
-              <a:t>MSE = 0.00252</a:t>
-            </a:r>
-          </a:p>
-          <a:p>
-            <a:pPr marL="628650" lvl="1" indent="-171450">
-              <a:buFont typeface="Arial" panose="020B0604020202020204" pitchFamily="34" charset="0"/>
-              <a:buChar char="•"/>
-            </a:pPr>
-            <a:r>
-              <a:rPr lang="en-US" sz="1200" dirty="0">
-                <a:latin typeface="Arial" panose="020B0604020202020204" pitchFamily="34" charset="0"/>
-                <a:cs typeface="Arial" panose="020B0604020202020204" pitchFamily="34" charset="0"/>
-                <a:sym typeface="Wingdings" panose="05000000000000000000" pitchFamily="2" charset="2"/>
-              </a:rPr>
-              <a:t>AUROC = 0.45</a:t>
-            </a:r>
-          </a:p>
-          <a:p>
-            <a:pPr lvl="1"/>
-            <a:endParaRPr lang="en-US" sz="1200" dirty="0">
-              <a:latin typeface="Arial" panose="020B0604020202020204" pitchFamily="34" charset="0"/>
-              <a:cs typeface="Arial" panose="020B0604020202020204" pitchFamily="34" charset="0"/>
-              <a:sym typeface="Wingdings" panose="05000000000000000000" pitchFamily="2" charset="2"/>
-            </a:endParaRPr>
-          </a:p>
-          <a:p>
-            <a:pPr lvl="1"/>
-            <a:endParaRPr lang="en-US" sz="1200" dirty="0">
-              <a:latin typeface="Arial" panose="020B0604020202020204" pitchFamily="34" charset="0"/>
-              <a:cs typeface="Arial" panose="020B0604020202020204" pitchFamily="34" charset="0"/>
-              <a:sym typeface="Wingdings" panose="05000000000000000000" pitchFamily="2" charset="2"/>
-            </a:endParaRPr>
-          </a:p>
-          <a:p>
-            <a:r>
-              <a:rPr lang="en-US" sz="1200" dirty="0">
-                <a:latin typeface="Arial" panose="020B0604020202020204" pitchFamily="34" charset="0"/>
-                <a:cs typeface="Arial" panose="020B0604020202020204" pitchFamily="34" charset="0"/>
-                <a:sym typeface="Wingdings" panose="05000000000000000000" pitchFamily="2" charset="2"/>
-              </a:rPr>
-              <a:t>higher </a:t>
-            </a:r>
-            <a:r>
-              <a:rPr lang="en-US" sz="1200" dirty="0" err="1">
-                <a:latin typeface="Arial" panose="020B0604020202020204" pitchFamily="34" charset="0"/>
-                <a:cs typeface="Arial" panose="020B0604020202020204" pitchFamily="34" charset="0"/>
-                <a:sym typeface="Wingdings" panose="05000000000000000000" pitchFamily="2" charset="2"/>
-              </a:rPr>
-              <a:t>ark_order</a:t>
-            </a:r>
-            <a:r>
-              <a:rPr lang="en-US" sz="1200" dirty="0">
-                <a:latin typeface="Arial" panose="020B0604020202020204" pitchFamily="34" charset="0"/>
-                <a:cs typeface="Arial" panose="020B0604020202020204" pitchFamily="34" charset="0"/>
-                <a:sym typeface="Wingdings" panose="05000000000000000000" pitchFamily="2" charset="2"/>
-              </a:rPr>
-              <a:t>  overfitting???? Try Reg</a:t>
-            </a:r>
-          </a:p>
-          <a:p>
-            <a:pPr marL="628650" lvl="1" indent="-171450">
-              <a:buFont typeface="Arial" panose="020B0604020202020204" pitchFamily="34" charset="0"/>
-              <a:buChar char="•"/>
-            </a:pPr>
-            <a:endParaRPr lang="en-US" sz="1200" dirty="0">
-              <a:latin typeface="Arial" panose="020B0604020202020204" pitchFamily="34" charset="0"/>
-              <a:cs typeface="Arial" panose="020B0604020202020204" pitchFamily="34" charset="0"/>
-              <a:sym typeface="Wingdings" panose="05000000000000000000" pitchFamily="2" charset="2"/>
-            </a:endParaRPr>
-          </a:p>
-        </p:txBody>
-      </p:sp>
+        </p:nvPicPr>
+        <p:blipFill>
+          <a:blip r:embed="rId2"/>
+          <a:stretch>
+            <a:fillRect/>
+          </a:stretch>
+        </p:blipFill>
+        <p:spPr>
+          <a:xfrm>
+            <a:off x="281758" y="876287"/>
+            <a:ext cx="5744137" cy="2847934"/>
+          </a:xfrm>
+          <a:prstGeom prst="rect">
+            <a:avLst/>
+          </a:prstGeom>
+        </p:spPr>
+      </p:pic>
+      <p:pic>
+        <p:nvPicPr>
+          <p:cNvPr id="7" name="Picture 6">
+            <a:extLst>
+              <a:ext uri="{FF2B5EF4-FFF2-40B4-BE49-F238E27FC236}">
+                <a16:creationId xmlns:a16="http://schemas.microsoft.com/office/drawing/2014/main" id="{AC3E2C7C-8105-9716-B8C9-CEA2333F6FA1}"/>
+              </a:ext>
+            </a:extLst>
+          </p:cNvPr>
+          <p:cNvPicPr>
+            <a:picLocks noChangeAspect="1"/>
+          </p:cNvPicPr>
+          <p:nvPr/>
+        </p:nvPicPr>
+        <p:blipFill>
+          <a:blip r:embed="rId3"/>
+          <a:stretch>
+            <a:fillRect/>
+          </a:stretch>
+        </p:blipFill>
+        <p:spPr>
+          <a:xfrm>
+            <a:off x="347473" y="3758180"/>
+            <a:ext cx="5605272" cy="2779085"/>
+          </a:xfrm>
+          <a:prstGeom prst="rect">
+            <a:avLst/>
+          </a:prstGeom>
+        </p:spPr>
+      </p:pic>
     </p:spTree>
     <p:extLst>
       <p:ext uri="{BB962C8B-B14F-4D97-AF65-F5344CB8AC3E}">
-        <p14:creationId xmlns:p14="http://schemas.microsoft.com/office/powerpoint/2010/main" val="1074485746"/>
+        <p14:creationId xmlns:p14="http://schemas.microsoft.com/office/powerpoint/2010/main" val="4114430426"/>
       </p:ext>
     </p:extLst>
   </p:cSld>
@@ -3877,72 +3641,12 @@
           <a:chExt cx="0" cy="0"/>
         </a:xfrm>
       </p:grpSpPr>
-      <p:pic>
-        <p:nvPicPr>
-          <p:cNvPr id="5" name="Picture 4">
-            <a:extLst>
-              <a:ext uri="{FF2B5EF4-FFF2-40B4-BE49-F238E27FC236}">
-                <a16:creationId xmlns:a16="http://schemas.microsoft.com/office/drawing/2014/main" id="{85F856E0-2FBE-B351-A4CA-601EE8886983}"/>
-              </a:ext>
-            </a:extLst>
-          </p:cNvPr>
-          <p:cNvPicPr>
-            <a:picLocks noChangeAspect="1"/>
-          </p:cNvPicPr>
-          <p:nvPr/>
-        </p:nvPicPr>
-        <p:blipFill>
-          <a:blip r:embed="rId2"/>
-          <a:stretch>
-            <a:fillRect/>
-          </a:stretch>
-        </p:blipFill>
-        <p:spPr>
-          <a:xfrm>
-            <a:off x="583198" y="1375295"/>
-            <a:ext cx="6151089" cy="3230428"/>
-          </a:xfrm>
-          <a:prstGeom prst="rect">
-            <a:avLst/>
-          </a:prstGeom>
-        </p:spPr>
-      </p:pic>
-      <p:pic>
-        <p:nvPicPr>
-          <p:cNvPr id="6" name="Picture 5">
-            <a:extLst>
-              <a:ext uri="{FF2B5EF4-FFF2-40B4-BE49-F238E27FC236}">
-                <a16:creationId xmlns:a16="http://schemas.microsoft.com/office/drawing/2014/main" id="{9206D824-97B4-CF72-49CB-796C8EA505CA}"/>
-              </a:ext>
-            </a:extLst>
-          </p:cNvPr>
-          <p:cNvPicPr>
-            <a:picLocks noChangeAspect="1"/>
-          </p:cNvPicPr>
-          <p:nvPr/>
-        </p:nvPicPr>
-        <p:blipFill>
-          <a:blip r:embed="rId3"/>
-          <a:stretch>
-            <a:fillRect/>
-          </a:stretch>
-        </p:blipFill>
-        <p:spPr>
-          <a:xfrm>
-            <a:off x="517039" y="3055897"/>
-            <a:ext cx="6663690" cy="3481368"/>
-          </a:xfrm>
-          <a:prstGeom prst="rect">
-            <a:avLst/>
-          </a:prstGeom>
-        </p:spPr>
-      </p:pic>
       <p:sp>
         <p:nvSpPr>
-          <p:cNvPr id="7" name="TextBox 6">
+          <p:cNvPr id="3" name="TextBox 2">
             <a:extLst>
               <a:ext uri="{FF2B5EF4-FFF2-40B4-BE49-F238E27FC236}">
-                <a16:creationId xmlns:a16="http://schemas.microsoft.com/office/drawing/2014/main" id="{510728AA-A5B9-DA4E-60BE-D9EEA01A5D82}"/>
+                <a16:creationId xmlns:a16="http://schemas.microsoft.com/office/drawing/2014/main" id="{D289D14C-14AD-7133-944C-7EDF3ACD9994}"/>
               </a:ext>
             </a:extLst>
           </p:cNvPr>
@@ -3982,10 +3686,262 @@
           </a:p>
         </p:txBody>
       </p:sp>
+      <p:sp>
+        <p:nvSpPr>
+          <p:cNvPr id="2" name="TextBox 1">
+            <a:extLst>
+              <a:ext uri="{FF2B5EF4-FFF2-40B4-BE49-F238E27FC236}">
+                <a16:creationId xmlns:a16="http://schemas.microsoft.com/office/drawing/2014/main" id="{451E625E-14BE-18C0-785E-5B8814C0909D}"/>
+              </a:ext>
+            </a:extLst>
+          </p:cNvPr>
+          <p:cNvSpPr txBox="1"/>
+          <p:nvPr/>
+        </p:nvSpPr>
+        <p:spPr>
+          <a:xfrm>
+            <a:off x="773510" y="1628507"/>
+            <a:ext cx="7777779" cy="3600986"/>
+          </a:xfrm>
+          <a:prstGeom prst="rect">
+            <a:avLst/>
+          </a:prstGeom>
+          <a:noFill/>
+        </p:spPr>
+        <p:txBody>
+          <a:bodyPr wrap="square" rtlCol="0">
+            <a:spAutoFit/>
+          </a:bodyPr>
+          <a:lstStyle/>
+          <a:p>
+            <a:r>
+              <a:rPr lang="en-US" sz="1200" u="sng" dirty="0">
+                <a:latin typeface="Arial" panose="020B0604020202020204" pitchFamily="34" charset="0"/>
+                <a:cs typeface="Arial" panose="020B0604020202020204" pitchFamily="34" charset="0"/>
+              </a:rPr>
+              <a:t>Low rank 35, lambda=0, k=4</a:t>
+            </a:r>
+          </a:p>
+          <a:p>
+            <a:pPr marL="628650" lvl="1" indent="-171450">
+              <a:buFont typeface="Arial" panose="020B0604020202020204" pitchFamily="34" charset="0"/>
+              <a:buChar char="•"/>
+            </a:pPr>
+            <a:r>
+              <a:rPr lang="en-US" sz="1200" dirty="0">
+                <a:latin typeface="Arial" panose="020B0604020202020204" pitchFamily="34" charset="0"/>
+                <a:cs typeface="Arial" panose="020B0604020202020204" pitchFamily="34" charset="0"/>
+                <a:sym typeface="Wingdings" panose="05000000000000000000" pitchFamily="2" charset="2"/>
+              </a:rPr>
+              <a:t>MSE = 0.000552</a:t>
+            </a:r>
+          </a:p>
+          <a:p>
+            <a:pPr marL="628650" lvl="1" indent="-171450">
+              <a:buFont typeface="Arial" panose="020B0604020202020204" pitchFamily="34" charset="0"/>
+              <a:buChar char="•"/>
+            </a:pPr>
+            <a:r>
+              <a:rPr lang="en-US" sz="1200" dirty="0">
+                <a:latin typeface="Arial" panose="020B0604020202020204" pitchFamily="34" charset="0"/>
+                <a:cs typeface="Arial" panose="020B0604020202020204" pitchFamily="34" charset="0"/>
+                <a:sym typeface="Wingdings" panose="05000000000000000000" pitchFamily="2" charset="2"/>
+              </a:rPr>
+              <a:t>AUROC = 0.765</a:t>
+            </a:r>
+          </a:p>
+          <a:p>
+            <a:endParaRPr lang="en-US" sz="1200" u="sng" dirty="0">
+              <a:latin typeface="Arial" panose="020B0604020202020204" pitchFamily="34" charset="0"/>
+              <a:cs typeface="Arial" panose="020B0604020202020204" pitchFamily="34" charset="0"/>
+            </a:endParaRPr>
+          </a:p>
+          <a:p>
+            <a:r>
+              <a:rPr lang="en-US" sz="1200" u="sng" dirty="0">
+                <a:latin typeface="Arial" panose="020B0604020202020204" pitchFamily="34" charset="0"/>
+                <a:cs typeface="Arial" panose="020B0604020202020204" pitchFamily="34" charset="0"/>
+              </a:rPr>
+              <a:t>Full rank, lambda=0, k=4</a:t>
+            </a:r>
+          </a:p>
+          <a:p>
+            <a:pPr marL="628650" lvl="1" indent="-171450">
+              <a:buFont typeface="Arial" panose="020B0604020202020204" pitchFamily="34" charset="0"/>
+              <a:buChar char="•"/>
+            </a:pPr>
+            <a:r>
+              <a:rPr lang="en-US" sz="1200" dirty="0">
+                <a:latin typeface="Arial" panose="020B0604020202020204" pitchFamily="34" charset="0"/>
+                <a:cs typeface="Arial" panose="020B0604020202020204" pitchFamily="34" charset="0"/>
+                <a:sym typeface="Wingdings" panose="05000000000000000000" pitchFamily="2" charset="2"/>
+              </a:rPr>
+              <a:t>MSE = 0.000322</a:t>
+            </a:r>
+          </a:p>
+          <a:p>
+            <a:pPr marL="628650" lvl="1" indent="-171450">
+              <a:buFont typeface="Arial" panose="020B0604020202020204" pitchFamily="34" charset="0"/>
+              <a:buChar char="•"/>
+            </a:pPr>
+            <a:r>
+              <a:rPr lang="en-US" sz="1200" dirty="0">
+                <a:latin typeface="Arial" panose="020B0604020202020204" pitchFamily="34" charset="0"/>
+                <a:cs typeface="Arial" panose="020B0604020202020204" pitchFamily="34" charset="0"/>
+                <a:sym typeface="Wingdings" panose="05000000000000000000" pitchFamily="2" charset="2"/>
+              </a:rPr>
+              <a:t>AUROC = 0.717</a:t>
+            </a:r>
+          </a:p>
+          <a:p>
+            <a:pPr lvl="1"/>
+            <a:endParaRPr lang="en-US" sz="1200" dirty="0">
+              <a:latin typeface="Arial" panose="020B0604020202020204" pitchFamily="34" charset="0"/>
+              <a:cs typeface="Arial" panose="020B0604020202020204" pitchFamily="34" charset="0"/>
+              <a:sym typeface="Wingdings" panose="05000000000000000000" pitchFamily="2" charset="2"/>
+            </a:endParaRPr>
+          </a:p>
+          <a:p>
+            <a:r>
+              <a:rPr lang="en-US" sz="1200" u="sng" dirty="0">
+                <a:latin typeface="Arial" panose="020B0604020202020204" pitchFamily="34" charset="0"/>
+                <a:cs typeface="Arial" panose="020B0604020202020204" pitchFamily="34" charset="0"/>
+              </a:rPr>
+              <a:t>Low rank 35, lambda=0, k=7</a:t>
+            </a:r>
+          </a:p>
+          <a:p>
+            <a:pPr marL="628650" lvl="1" indent="-171450">
+              <a:buFont typeface="Arial" panose="020B0604020202020204" pitchFamily="34" charset="0"/>
+              <a:buChar char="•"/>
+            </a:pPr>
+            <a:r>
+              <a:rPr lang="en-US" sz="1200" dirty="0">
+                <a:latin typeface="Arial" panose="020B0604020202020204" pitchFamily="34" charset="0"/>
+                <a:cs typeface="Arial" panose="020B0604020202020204" pitchFamily="34" charset="0"/>
+                <a:sym typeface="Wingdings" panose="05000000000000000000" pitchFamily="2" charset="2"/>
+              </a:rPr>
+              <a:t>MSE = 0.00928</a:t>
+            </a:r>
+          </a:p>
+          <a:p>
+            <a:pPr marL="628650" lvl="1" indent="-171450">
+              <a:buFont typeface="Arial" panose="020B0604020202020204" pitchFamily="34" charset="0"/>
+              <a:buChar char="•"/>
+            </a:pPr>
+            <a:r>
+              <a:rPr lang="en-US" sz="1200" dirty="0">
+                <a:latin typeface="Arial" panose="020B0604020202020204" pitchFamily="34" charset="0"/>
+                <a:cs typeface="Arial" panose="020B0604020202020204" pitchFamily="34" charset="0"/>
+                <a:sym typeface="Wingdings" panose="05000000000000000000" pitchFamily="2" charset="2"/>
+              </a:rPr>
+              <a:t>AUROC = 0.712</a:t>
+            </a:r>
+          </a:p>
+          <a:p>
+            <a:pPr lvl="1"/>
+            <a:endParaRPr lang="en-US" sz="1200" dirty="0">
+              <a:latin typeface="Arial" panose="020B0604020202020204" pitchFamily="34" charset="0"/>
+              <a:cs typeface="Arial" panose="020B0604020202020204" pitchFamily="34" charset="0"/>
+              <a:sym typeface="Wingdings" panose="05000000000000000000" pitchFamily="2" charset="2"/>
+            </a:endParaRPr>
+          </a:p>
+          <a:p>
+            <a:r>
+              <a:rPr lang="en-US" sz="1200" u="sng" dirty="0">
+                <a:latin typeface="Arial" panose="020B0604020202020204" pitchFamily="34" charset="0"/>
+                <a:cs typeface="Arial" panose="020B0604020202020204" pitchFamily="34" charset="0"/>
+              </a:rPr>
+              <a:t>Full rank, lambda=0, k=7</a:t>
+            </a:r>
+          </a:p>
+          <a:p>
+            <a:pPr marL="628650" lvl="1" indent="-171450">
+              <a:buFont typeface="Arial" panose="020B0604020202020204" pitchFamily="34" charset="0"/>
+              <a:buChar char="•"/>
+            </a:pPr>
+            <a:r>
+              <a:rPr lang="en-US" sz="1200" dirty="0">
+                <a:latin typeface="Arial" panose="020B0604020202020204" pitchFamily="34" charset="0"/>
+                <a:cs typeface="Arial" panose="020B0604020202020204" pitchFamily="34" charset="0"/>
+                <a:sym typeface="Wingdings" panose="05000000000000000000" pitchFamily="2" charset="2"/>
+              </a:rPr>
+              <a:t>MSE = 0.00252</a:t>
+            </a:r>
+          </a:p>
+          <a:p>
+            <a:pPr marL="628650" lvl="1" indent="-171450">
+              <a:buFont typeface="Arial" panose="020B0604020202020204" pitchFamily="34" charset="0"/>
+              <a:buChar char="•"/>
+            </a:pPr>
+            <a:r>
+              <a:rPr lang="en-US" sz="1200" dirty="0">
+                <a:latin typeface="Arial" panose="020B0604020202020204" pitchFamily="34" charset="0"/>
+                <a:cs typeface="Arial" panose="020B0604020202020204" pitchFamily="34" charset="0"/>
+                <a:sym typeface="Wingdings" panose="05000000000000000000" pitchFamily="2" charset="2"/>
+              </a:rPr>
+              <a:t>AUROC = 0.45</a:t>
+            </a:r>
+          </a:p>
+          <a:p>
+            <a:pPr lvl="1"/>
+            <a:endParaRPr lang="en-US" sz="1200" dirty="0">
+              <a:latin typeface="Arial" panose="020B0604020202020204" pitchFamily="34" charset="0"/>
+              <a:cs typeface="Arial" panose="020B0604020202020204" pitchFamily="34" charset="0"/>
+              <a:sym typeface="Wingdings" panose="05000000000000000000" pitchFamily="2" charset="2"/>
+            </a:endParaRPr>
+          </a:p>
+          <a:p>
+            <a:pPr lvl="1"/>
+            <a:endParaRPr lang="en-US" sz="1200" dirty="0">
+              <a:latin typeface="Arial" panose="020B0604020202020204" pitchFamily="34" charset="0"/>
+              <a:cs typeface="Arial" panose="020B0604020202020204" pitchFamily="34" charset="0"/>
+              <a:sym typeface="Wingdings" panose="05000000000000000000" pitchFamily="2" charset="2"/>
+            </a:endParaRPr>
+          </a:p>
+          <a:p>
+            <a:r>
+              <a:rPr lang="en-US" sz="1200" dirty="0">
+                <a:latin typeface="Arial" panose="020B0604020202020204" pitchFamily="34" charset="0"/>
+                <a:cs typeface="Arial" panose="020B0604020202020204" pitchFamily="34" charset="0"/>
+                <a:sym typeface="Wingdings" panose="05000000000000000000" pitchFamily="2" charset="2"/>
+              </a:rPr>
+              <a:t>higher </a:t>
+            </a:r>
+            <a:r>
+              <a:rPr lang="en-US" sz="1200" dirty="0" err="1">
+                <a:latin typeface="Arial" panose="020B0604020202020204" pitchFamily="34" charset="0"/>
+                <a:cs typeface="Arial" panose="020B0604020202020204" pitchFamily="34" charset="0"/>
+                <a:sym typeface="Wingdings" panose="05000000000000000000" pitchFamily="2" charset="2"/>
+              </a:rPr>
+              <a:t>ark_order</a:t>
+            </a:r>
+            <a:r>
+              <a:rPr lang="en-US" sz="1200" dirty="0">
+                <a:latin typeface="Arial" panose="020B0604020202020204" pitchFamily="34" charset="0"/>
+                <a:cs typeface="Arial" panose="020B0604020202020204" pitchFamily="34" charset="0"/>
+                <a:sym typeface="Wingdings" panose="05000000000000000000" pitchFamily="2" charset="2"/>
+              </a:rPr>
+              <a:t>  overfitting???? Try Reg</a:t>
+            </a:r>
+          </a:p>
+          <a:p>
+            <a:pPr marL="628650" lvl="1" indent="-171450">
+              <a:buFont typeface="Arial" panose="020B0604020202020204" pitchFamily="34" charset="0"/>
+              <a:buChar char="•"/>
+            </a:pPr>
+            <a:endParaRPr lang="en-US" sz="1200" dirty="0">
+              <a:latin typeface="Arial" panose="020B0604020202020204" pitchFamily="34" charset="0"/>
+              <a:cs typeface="Arial" panose="020B0604020202020204" pitchFamily="34" charset="0"/>
+              <a:sym typeface="Wingdings" panose="05000000000000000000" pitchFamily="2" charset="2"/>
+            </a:endParaRPr>
+          </a:p>
+        </p:txBody>
+      </p:sp>
     </p:spTree>
     <p:extLst>
       <p:ext uri="{BB962C8B-B14F-4D97-AF65-F5344CB8AC3E}">
-        <p14:creationId xmlns:p14="http://schemas.microsoft.com/office/powerpoint/2010/main" val="1916644394"/>
+        <p14:creationId xmlns:p14="http://schemas.microsoft.com/office/powerpoint/2010/main" val="1074485746"/>
       </p:ext>
     </p:extLst>
   </p:cSld>
@@ -4012,6 +3968,141 @@
           <a:chExt cx="0" cy="0"/>
         </a:xfrm>
       </p:grpSpPr>
+      <p:pic>
+        <p:nvPicPr>
+          <p:cNvPr id="5" name="Picture 4">
+            <a:extLst>
+              <a:ext uri="{FF2B5EF4-FFF2-40B4-BE49-F238E27FC236}">
+                <a16:creationId xmlns:a16="http://schemas.microsoft.com/office/drawing/2014/main" id="{85F856E0-2FBE-B351-A4CA-601EE8886983}"/>
+              </a:ext>
+            </a:extLst>
+          </p:cNvPr>
+          <p:cNvPicPr>
+            <a:picLocks noChangeAspect="1"/>
+          </p:cNvPicPr>
+          <p:nvPr/>
+        </p:nvPicPr>
+        <p:blipFill>
+          <a:blip r:embed="rId2"/>
+          <a:stretch>
+            <a:fillRect/>
+          </a:stretch>
+        </p:blipFill>
+        <p:spPr>
+          <a:xfrm>
+            <a:off x="583198" y="1375295"/>
+            <a:ext cx="6151089" cy="3230428"/>
+          </a:xfrm>
+          <a:prstGeom prst="rect">
+            <a:avLst/>
+          </a:prstGeom>
+        </p:spPr>
+      </p:pic>
+      <p:pic>
+        <p:nvPicPr>
+          <p:cNvPr id="6" name="Picture 5">
+            <a:extLst>
+              <a:ext uri="{FF2B5EF4-FFF2-40B4-BE49-F238E27FC236}">
+                <a16:creationId xmlns:a16="http://schemas.microsoft.com/office/drawing/2014/main" id="{9206D824-97B4-CF72-49CB-796C8EA505CA}"/>
+              </a:ext>
+            </a:extLst>
+          </p:cNvPr>
+          <p:cNvPicPr>
+            <a:picLocks noChangeAspect="1"/>
+          </p:cNvPicPr>
+          <p:nvPr/>
+        </p:nvPicPr>
+        <p:blipFill>
+          <a:blip r:embed="rId3"/>
+          <a:stretch>
+            <a:fillRect/>
+          </a:stretch>
+        </p:blipFill>
+        <p:spPr>
+          <a:xfrm>
+            <a:off x="517039" y="3055897"/>
+            <a:ext cx="6663690" cy="3481368"/>
+          </a:xfrm>
+          <a:prstGeom prst="rect">
+            <a:avLst/>
+          </a:prstGeom>
+        </p:spPr>
+      </p:pic>
+      <p:sp>
+        <p:nvSpPr>
+          <p:cNvPr id="7" name="TextBox 6">
+            <a:extLst>
+              <a:ext uri="{FF2B5EF4-FFF2-40B4-BE49-F238E27FC236}">
+                <a16:creationId xmlns:a16="http://schemas.microsoft.com/office/drawing/2014/main" id="{510728AA-A5B9-DA4E-60BE-D9EEA01A5D82}"/>
+              </a:ext>
+            </a:extLst>
+          </p:cNvPr>
+          <p:cNvSpPr txBox="1"/>
+          <p:nvPr/>
+        </p:nvSpPr>
+        <p:spPr>
+          <a:xfrm>
+            <a:off x="281758" y="320735"/>
+            <a:ext cx="5744137" cy="461665"/>
+          </a:xfrm>
+          <a:prstGeom prst="rect">
+            <a:avLst/>
+          </a:prstGeom>
+          <a:noFill/>
+        </p:spPr>
+        <p:txBody>
+          <a:bodyPr wrap="square">
+            <a:spAutoFit/>
+          </a:bodyPr>
+          <a:lstStyle/>
+          <a:p>
+            <a:r>
+              <a:rPr lang="en-US" sz="2400" b="1" dirty="0" err="1">
+                <a:latin typeface="Arial" panose="020B0604020202020204" pitchFamily="34" charset="0"/>
+                <a:cs typeface="Arial" panose="020B0604020202020204" pitchFamily="34" charset="0"/>
+              </a:rPr>
+              <a:t>Ark_order</a:t>
+            </a:r>
+            <a:r>
+              <a:rPr lang="en-US" sz="2400" b="1" dirty="0">
+                <a:latin typeface="Arial" panose="020B0604020202020204" pitchFamily="34" charset="0"/>
+                <a:cs typeface="Arial" panose="020B0604020202020204" pitchFamily="34" charset="0"/>
+              </a:rPr>
+              <a:t> tuning</a:t>
+            </a:r>
+          </a:p>
+        </p:txBody>
+      </p:sp>
+    </p:spTree>
+    <p:extLst>
+      <p:ext uri="{BB962C8B-B14F-4D97-AF65-F5344CB8AC3E}">
+        <p14:creationId xmlns:p14="http://schemas.microsoft.com/office/powerpoint/2010/main" val="1916644394"/>
+      </p:ext>
+    </p:extLst>
+  </p:cSld>
+  <p:clrMapOvr>
+    <a:masterClrMapping/>
+  </p:clrMapOvr>
+</p:sld>
+</file>
+
+<file path=ppt/slides/slide17.xml><?xml version="1.0" encoding="utf-8"?>
+<p:sld xmlns:a="http://schemas.openxmlformats.org/drawingml/2006/main" xmlns:r="http://schemas.openxmlformats.org/officeDocument/2006/relationships" xmlns:p="http://schemas.openxmlformats.org/presentationml/2006/main">
+  <p:cSld>
+    <p:spTree>
+      <p:nvGrpSpPr>
+        <p:cNvPr id="1" name=""/>
+        <p:cNvGrpSpPr/>
+        <p:nvPr/>
+      </p:nvGrpSpPr>
+      <p:grpSpPr>
+        <a:xfrm>
+          <a:off x="0" y="0"/>
+          <a:ext cx="0" cy="0"/>
+          <a:chOff x="0" y="0"/>
+          <a:chExt cx="0" cy="0"/>
+        </a:xfrm>
+      </p:grpSpPr>
       <p:sp>
         <p:nvSpPr>
           <p:cNvPr id="7" name="TextBox 6">
@@ -4100,7 +4191,7 @@
 </p:sld>
 </file>
 
-<file path=ppt/slides/slide17.xml><?xml version="1.0" encoding="utf-8"?>
+<file path=ppt/slides/slide18.xml><?xml version="1.0" encoding="utf-8"?>
 <p:sld xmlns:a="http://schemas.openxmlformats.org/drawingml/2006/main" xmlns:r="http://schemas.openxmlformats.org/officeDocument/2006/relationships" xmlns:p="http://schemas.openxmlformats.org/presentationml/2006/main">
   <p:cSld>
     <p:spTree>
@@ -4225,374 +4316,6 @@
 </p:sld>
 </file>
 
-<file path=ppt/slides/slide18.xml><?xml version="1.0" encoding="utf-8"?>
-<p:sld xmlns:a="http://schemas.openxmlformats.org/drawingml/2006/main" xmlns:r="http://schemas.openxmlformats.org/officeDocument/2006/relationships" xmlns:p="http://schemas.openxmlformats.org/presentationml/2006/main">
-  <p:cSld>
-    <p:spTree>
-      <p:nvGrpSpPr>
-        <p:cNvPr id="1" name=""/>
-        <p:cNvGrpSpPr/>
-        <p:nvPr/>
-      </p:nvGrpSpPr>
-      <p:grpSpPr>
-        <a:xfrm>
-          <a:off x="0" y="0"/>
-          <a:ext cx="0" cy="0"/>
-          <a:chOff x="0" y="0"/>
-          <a:chExt cx="0" cy="0"/>
-        </a:xfrm>
-      </p:grpSpPr>
-      <p:sp>
-        <p:nvSpPr>
-          <p:cNvPr id="6" name="TextBox 5">
-            <a:extLst>
-              <a:ext uri="{FF2B5EF4-FFF2-40B4-BE49-F238E27FC236}">
-                <a16:creationId xmlns:a16="http://schemas.microsoft.com/office/drawing/2014/main" id="{17004B4E-504F-52C4-8B57-9E2829783A64}"/>
-              </a:ext>
-            </a:extLst>
-          </p:cNvPr>
-          <p:cNvSpPr txBox="1"/>
-          <p:nvPr/>
-        </p:nvSpPr>
-        <p:spPr>
-          <a:xfrm>
-            <a:off x="281758" y="320735"/>
-            <a:ext cx="5744137" cy="461665"/>
-          </a:xfrm>
-          <a:prstGeom prst="rect">
-            <a:avLst/>
-          </a:prstGeom>
-          <a:noFill/>
-        </p:spPr>
-        <p:txBody>
-          <a:bodyPr wrap="square">
-            <a:spAutoFit/>
-          </a:bodyPr>
-          <a:lstStyle/>
-          <a:p>
-            <a:r>
-              <a:rPr lang="en-US" sz="2400" b="1" dirty="0">
-                <a:latin typeface="Arial" panose="020B0604020202020204" pitchFamily="34" charset="0"/>
-                <a:cs typeface="Arial" panose="020B0604020202020204" pitchFamily="34" charset="0"/>
-              </a:rPr>
-              <a:t>Discussion Threads</a:t>
-            </a:r>
-          </a:p>
-        </p:txBody>
-      </p:sp>
-      <p:sp>
-        <p:nvSpPr>
-          <p:cNvPr id="15" name="TextBox 14">
-            <a:extLst>
-              <a:ext uri="{FF2B5EF4-FFF2-40B4-BE49-F238E27FC236}">
-                <a16:creationId xmlns:a16="http://schemas.microsoft.com/office/drawing/2014/main" id="{55E49167-2407-D0E6-6F4E-E3447C3F3F0A}"/>
-              </a:ext>
-            </a:extLst>
-          </p:cNvPr>
-          <p:cNvSpPr txBox="1"/>
-          <p:nvPr/>
-        </p:nvSpPr>
-        <p:spPr>
-          <a:xfrm>
-            <a:off x="202735" y="786078"/>
-            <a:ext cx="7972746" cy="5693866"/>
-          </a:xfrm>
-          <a:prstGeom prst="rect">
-            <a:avLst/>
-          </a:prstGeom>
-          <a:noFill/>
-        </p:spPr>
-        <p:txBody>
-          <a:bodyPr wrap="square" rtlCol="0">
-            <a:spAutoFit/>
-          </a:bodyPr>
-          <a:lstStyle/>
-          <a:p>
-            <a:r>
-              <a:rPr lang="en-US" sz="1400" dirty="0">
-                <a:latin typeface="Arial" panose="020B0604020202020204" pitchFamily="34" charset="0"/>
-                <a:cs typeface="Arial" panose="020B0604020202020204" pitchFamily="34" charset="0"/>
-              </a:rPr>
-              <a:t>Done/ongoing</a:t>
-            </a:r>
-          </a:p>
-          <a:p>
-            <a:pPr marL="285750" indent="-285750">
-              <a:buFont typeface="Arial" panose="020B0604020202020204" pitchFamily="34" charset="0"/>
-              <a:buChar char="•"/>
-            </a:pPr>
-            <a:r>
-              <a:rPr lang="en-US" sz="1400" dirty="0">
-                <a:latin typeface="Arial" panose="020B0604020202020204" pitchFamily="34" charset="0"/>
-                <a:cs typeface="Arial" panose="020B0604020202020204" pitchFamily="34" charset="0"/>
-              </a:rPr>
-              <a:t>Try Learning rates 1 or 2 order of magnitudes smaller for regularization to address the massive MSEs</a:t>
-            </a:r>
-          </a:p>
-          <a:p>
-            <a:pPr marL="285750" indent="-285750">
-              <a:buFont typeface="Arial" panose="020B0604020202020204" pitchFamily="34" charset="0"/>
-              <a:buChar char="•"/>
-            </a:pPr>
-            <a:r>
-              <a:rPr lang="en-US" sz="1400" dirty="0">
-                <a:latin typeface="Arial" panose="020B0604020202020204" pitchFamily="34" charset="0"/>
-                <a:cs typeface="Arial" panose="020B0604020202020204" pitchFamily="34" charset="0"/>
-              </a:rPr>
-              <a:t>Try empty initialization</a:t>
-            </a:r>
-          </a:p>
-          <a:p>
-            <a:pPr marL="285750" indent="-285750">
-              <a:buFont typeface="Arial" panose="020B0604020202020204" pitchFamily="34" charset="0"/>
-              <a:buChar char="•"/>
-            </a:pPr>
-            <a:r>
-              <a:rPr lang="en-US" sz="1400" dirty="0">
-                <a:latin typeface="Arial" panose="020B0604020202020204" pitchFamily="34" charset="0"/>
-                <a:cs typeface="Arial" panose="020B0604020202020204" pitchFamily="34" charset="0"/>
-              </a:rPr>
-              <a:t>Closed-Form Ridge Regression</a:t>
-            </a:r>
-          </a:p>
-          <a:p>
-            <a:pPr marL="742950" lvl="1" indent="-285750">
-              <a:buFont typeface="Courier New" panose="02070309020205020404" pitchFamily="49" charset="0"/>
-              <a:buChar char="o"/>
-            </a:pPr>
-            <a:r>
-              <a:rPr lang="en-US" sz="1400" dirty="0">
-                <a:latin typeface="Arial" panose="020B0604020202020204" pitchFamily="34" charset="0"/>
-                <a:cs typeface="Arial" panose="020B0604020202020204" pitchFamily="34" charset="0"/>
-              </a:rPr>
-              <a:t>Closed-Form solutions can give us assurance that the torch model should EVENTUALLY converge to this solution with enough epochs and assuming all other hyperparameters are tuned correctly</a:t>
-            </a:r>
-          </a:p>
-          <a:p>
-            <a:pPr marL="285750" indent="-285750">
-              <a:buFont typeface="Arial" panose="020B0604020202020204" pitchFamily="34" charset="0"/>
-              <a:buChar char="•"/>
-            </a:pPr>
-            <a:r>
-              <a:rPr lang="en-US" sz="1400" dirty="0">
-                <a:latin typeface="Arial" panose="020B0604020202020204" pitchFamily="34" charset="0"/>
-                <a:cs typeface="Arial" panose="020B0604020202020204" pitchFamily="34" charset="0"/>
-              </a:rPr>
-              <a:t>Make </a:t>
-            </a:r>
-            <a:r>
-              <a:rPr lang="en-US" sz="1400" dirty="0" err="1">
-                <a:latin typeface="Arial" panose="020B0604020202020204" pitchFamily="34" charset="0"/>
-                <a:cs typeface="Arial" panose="020B0604020202020204" pitchFamily="34" charset="0"/>
-              </a:rPr>
-              <a:t>Github</a:t>
-            </a:r>
-            <a:r>
-              <a:rPr lang="en-US" sz="1400" dirty="0">
-                <a:latin typeface="Arial" panose="020B0604020202020204" pitchFamily="34" charset="0"/>
-                <a:cs typeface="Arial" panose="020B0604020202020204" pitchFamily="34" charset="0"/>
-              </a:rPr>
-              <a:t> Repo</a:t>
-            </a:r>
-          </a:p>
-          <a:p>
-            <a:pPr marL="285750" indent="-285750">
-              <a:buFont typeface="Arial" panose="020B0604020202020204" pitchFamily="34" charset="0"/>
-              <a:buChar char="•"/>
-            </a:pPr>
-            <a:r>
-              <a:rPr lang="en-US" sz="1400" dirty="0">
-                <a:latin typeface="Arial" panose="020B0604020202020204" pitchFamily="34" charset="0"/>
-                <a:cs typeface="Arial" panose="020B0604020202020204" pitchFamily="34" charset="0"/>
-              </a:rPr>
-              <a:t>Effect of Regularization on Low Rank models</a:t>
-            </a:r>
-          </a:p>
-          <a:p>
-            <a:endParaRPr lang="en-US" sz="1400" dirty="0">
-              <a:latin typeface="Arial" panose="020B0604020202020204" pitchFamily="34" charset="0"/>
-              <a:cs typeface="Arial" panose="020B0604020202020204" pitchFamily="34" charset="0"/>
-            </a:endParaRPr>
-          </a:p>
-          <a:p>
-            <a:pPr marL="285750" indent="-285750">
-              <a:buFont typeface="Arial" panose="020B0604020202020204" pitchFamily="34" charset="0"/>
-              <a:buChar char="•"/>
-            </a:pPr>
-            <a:endParaRPr lang="en-US" sz="1400" dirty="0">
-              <a:latin typeface="Arial" panose="020B0604020202020204" pitchFamily="34" charset="0"/>
-              <a:cs typeface="Arial" panose="020B0604020202020204" pitchFamily="34" charset="0"/>
-            </a:endParaRPr>
-          </a:p>
-          <a:p>
-            <a:r>
-              <a:rPr lang="en-US" sz="1400" dirty="0">
-                <a:latin typeface="Arial" panose="020B0604020202020204" pitchFamily="34" charset="0"/>
-                <a:cs typeface="Arial" panose="020B0604020202020204" pitchFamily="34" charset="0"/>
-              </a:rPr>
-              <a:t>Next Steps/Direction</a:t>
-            </a:r>
-          </a:p>
-          <a:p>
-            <a:endParaRPr lang="en-US" sz="1400" dirty="0">
-              <a:latin typeface="Arial" panose="020B0604020202020204" pitchFamily="34" charset="0"/>
-              <a:cs typeface="Arial" panose="020B0604020202020204" pitchFamily="34" charset="0"/>
-            </a:endParaRPr>
-          </a:p>
-          <a:p>
-            <a:pPr marL="285750" indent="-285750">
-              <a:buFont typeface="Arial" panose="020B0604020202020204" pitchFamily="34" charset="0"/>
-              <a:buChar char="•"/>
-            </a:pPr>
-            <a:r>
-              <a:rPr lang="en-US" sz="1400" dirty="0">
-                <a:latin typeface="Arial" panose="020B0604020202020204" pitchFamily="34" charset="0"/>
-                <a:cs typeface="Arial" panose="020B0604020202020204" pitchFamily="34" charset="0"/>
-              </a:rPr>
-              <a:t>Q: If we took the closed-form W/</a:t>
-            </a:r>
-            <a:r>
-              <a:rPr lang="en-US" sz="1400" dirty="0" err="1">
-                <a:latin typeface="Arial" panose="020B0604020202020204" pitchFamily="34" charset="0"/>
-                <a:cs typeface="Arial" panose="020B0604020202020204" pitchFamily="34" charset="0"/>
-              </a:rPr>
-              <a:t>Ahat</a:t>
-            </a:r>
-            <a:r>
-              <a:rPr lang="en-US" sz="1400" dirty="0">
-                <a:latin typeface="Arial" panose="020B0604020202020204" pitchFamily="34" charset="0"/>
-                <a:cs typeface="Arial" panose="020B0604020202020204" pitchFamily="34" charset="0"/>
-              </a:rPr>
-              <a:t> which is (502,4017), did SVD with rank 502 on it, then initialized the torch model with that </a:t>
-            </a:r>
-            <a:r>
-              <a:rPr lang="en-US" sz="1400" dirty="0" err="1">
-                <a:latin typeface="Arial" panose="020B0604020202020204" pitchFamily="34" charset="0"/>
-                <a:cs typeface="Arial" panose="020B0604020202020204" pitchFamily="34" charset="0"/>
-              </a:rPr>
-              <a:t>SVD’d</a:t>
-            </a:r>
-            <a:r>
-              <a:rPr lang="en-US" sz="1400" dirty="0">
-                <a:latin typeface="Arial" panose="020B0604020202020204" pitchFamily="34" charset="0"/>
-                <a:cs typeface="Arial" panose="020B0604020202020204" pitchFamily="34" charset="0"/>
-              </a:rPr>
-              <a:t> init_value I expect and want it to stay at the closed-form, It bothers me that it doesn’t.</a:t>
-            </a:r>
-          </a:p>
-          <a:p>
-            <a:endParaRPr lang="en-US" sz="1400" dirty="0">
-              <a:latin typeface="Arial" panose="020B0604020202020204" pitchFamily="34" charset="0"/>
-              <a:cs typeface="Arial" panose="020B0604020202020204" pitchFamily="34" charset="0"/>
-            </a:endParaRPr>
-          </a:p>
-          <a:p>
-            <a:pPr marL="285750" indent="-285750">
-              <a:buFont typeface="Arial" panose="020B0604020202020204" pitchFamily="34" charset="0"/>
-              <a:buChar char="•"/>
-            </a:pPr>
-            <a:r>
-              <a:rPr lang="en-US" sz="1400" dirty="0">
-                <a:latin typeface="Arial" panose="020B0604020202020204" pitchFamily="34" charset="0"/>
-                <a:cs typeface="Arial" panose="020B0604020202020204" pitchFamily="34" charset="0"/>
-              </a:rPr>
-              <a:t>Take Reduced Rank Ridge Regression closed-form solutions, initialize torch model with that and confirm that the model stays at that closed-form solution.</a:t>
-            </a:r>
-          </a:p>
-          <a:p>
-            <a:pPr marL="285750" indent="-285750">
-              <a:buFont typeface="Arial" panose="020B0604020202020204" pitchFamily="34" charset="0"/>
-              <a:buChar char="•"/>
-            </a:pPr>
-            <a:r>
-              <a:rPr lang="en-US" sz="1400" dirty="0">
-                <a:latin typeface="Arial" panose="020B0604020202020204" pitchFamily="34" charset="0"/>
-                <a:cs typeface="Arial" panose="020B0604020202020204" pitchFamily="34" charset="0"/>
-              </a:rPr>
-              <a:t>Nested cross validation loop – Joe Lambda first, then rank</a:t>
-            </a:r>
-          </a:p>
-          <a:p>
-            <a:pPr marL="285750" indent="-285750">
-              <a:buFont typeface="Arial" panose="020B0604020202020204" pitchFamily="34" charset="0"/>
-              <a:buChar char="•"/>
-            </a:pPr>
-            <a:r>
-              <a:rPr lang="en-US" sz="1400" dirty="0">
-                <a:latin typeface="Arial" panose="020B0604020202020204" pitchFamily="34" charset="0"/>
-                <a:cs typeface="Arial" panose="020B0604020202020204" pitchFamily="34" charset="0"/>
-              </a:rPr>
-              <a:t>Closed form training MSE for reduced ridge regression, compare to torch reg train loss, torch reg train loss should eventually arrive to this</a:t>
-            </a:r>
-          </a:p>
-          <a:p>
-            <a:endParaRPr lang="en-US" sz="1400" dirty="0">
-              <a:latin typeface="Arial" panose="020B0604020202020204" pitchFamily="34" charset="0"/>
-              <a:cs typeface="Arial" panose="020B0604020202020204" pitchFamily="34" charset="0"/>
-            </a:endParaRPr>
-          </a:p>
-          <a:p>
-            <a:pPr marL="285750" indent="-285750">
-              <a:buFont typeface="Arial" panose="020B0604020202020204" pitchFamily="34" charset="0"/>
-              <a:buChar char="•"/>
-            </a:pPr>
-            <a:r>
-              <a:rPr lang="en-US" sz="1400" dirty="0">
-                <a:latin typeface="Arial" panose="020B0604020202020204" pitchFamily="34" charset="0"/>
-                <a:cs typeface="Arial" panose="020B0604020202020204" pitchFamily="34" charset="0"/>
-              </a:rPr>
-              <a:t>Gradient Descent w/ rollout vs current approach (predict 4 </a:t>
-            </a:r>
-            <a:r>
-              <a:rPr lang="en-US" sz="1400" dirty="0" err="1">
-                <a:latin typeface="Arial" panose="020B0604020202020204" pitchFamily="34" charset="0"/>
-                <a:cs typeface="Arial" panose="020B0604020202020204" pitchFamily="34" charset="0"/>
-              </a:rPr>
-              <a:t>x_next</a:t>
-            </a:r>
-            <a:r>
-              <a:rPr lang="en-US" sz="1400" dirty="0">
-                <a:latin typeface="Arial" panose="020B0604020202020204" pitchFamily="34" charset="0"/>
-                <a:cs typeface="Arial" panose="020B0604020202020204" pitchFamily="34" charset="0"/>
-              </a:rPr>
-              <a:t>, instead of 1 </a:t>
-            </a:r>
-            <a:r>
-              <a:rPr lang="en-US" sz="1400" dirty="0" err="1">
-                <a:latin typeface="Arial" panose="020B0604020202020204" pitchFamily="34" charset="0"/>
-                <a:cs typeface="Arial" panose="020B0604020202020204" pitchFamily="34" charset="0"/>
-              </a:rPr>
-              <a:t>x_next</a:t>
-            </a:r>
-            <a:r>
-              <a:rPr lang="en-US" sz="1400" dirty="0">
-                <a:latin typeface="Arial" panose="020B0604020202020204" pitchFamily="34" charset="0"/>
-                <a:cs typeface="Arial" panose="020B0604020202020204" pitchFamily="34" charset="0"/>
-              </a:rPr>
-              <a:t>)</a:t>
-            </a:r>
-          </a:p>
-          <a:p>
-            <a:endParaRPr lang="en-US" sz="1400" dirty="0">
-              <a:latin typeface="Arial" panose="020B0604020202020204" pitchFamily="34" charset="0"/>
-              <a:cs typeface="Arial" panose="020B0604020202020204" pitchFamily="34" charset="0"/>
-            </a:endParaRPr>
-          </a:p>
-        </p:txBody>
-      </p:sp>
-    </p:spTree>
-    <p:extLst>
-      <p:ext uri="{BB962C8B-B14F-4D97-AF65-F5344CB8AC3E}">
-        <p14:creationId xmlns:p14="http://schemas.microsoft.com/office/powerpoint/2010/main" val="4242679506"/>
-      </p:ext>
-    </p:extLst>
-  </p:cSld>
-  <p:clrMapOvr>
-    <a:masterClrMapping/>
-  </p:clrMapOvr>
-</p:sld>
-</file>
-
 <file path=ppt/slides/slide19.xml><?xml version="1.0" encoding="utf-8"?>
 <p:sld xmlns:a="http://schemas.openxmlformats.org/drawingml/2006/main" xmlns:r="http://schemas.openxmlformats.org/officeDocument/2006/relationships" xmlns:p="http://schemas.openxmlformats.org/presentationml/2006/main">
   <p:cSld>
@@ -4615,7 +4338,7 @@
           <p:cNvPr id="6" name="TextBox 5">
             <a:extLst>
               <a:ext uri="{FF2B5EF4-FFF2-40B4-BE49-F238E27FC236}">
-                <a16:creationId xmlns:a16="http://schemas.microsoft.com/office/drawing/2014/main" id="{B8A72ACA-1126-A591-65FB-6F516617AA73}"/>
+                <a16:creationId xmlns:a16="http://schemas.microsoft.com/office/drawing/2014/main" id="{17004B4E-504F-52C4-8B57-9E2829783A64}"/>
               </a:ext>
             </a:extLst>
           </p:cNvPr>
@@ -4643,17 +4366,17 @@
                 <a:latin typeface="Arial" panose="020B0604020202020204" pitchFamily="34" charset="0"/>
                 <a:cs typeface="Arial" panose="020B0604020202020204" pitchFamily="34" charset="0"/>
               </a:rPr>
-              <a:t>Extremely high MSE?</a:t>
+              <a:t>Discussion Threads</a:t>
             </a:r>
           </a:p>
         </p:txBody>
       </p:sp>
       <p:sp>
         <p:nvSpPr>
-          <p:cNvPr id="8" name="TextBox 7">
+          <p:cNvPr id="15" name="TextBox 14">
             <a:extLst>
               <a:ext uri="{FF2B5EF4-FFF2-40B4-BE49-F238E27FC236}">
-                <a16:creationId xmlns:a16="http://schemas.microsoft.com/office/drawing/2014/main" id="{EADD84AF-CA8E-9821-FA4D-447C01A75360}"/>
+                <a16:creationId xmlns:a16="http://schemas.microsoft.com/office/drawing/2014/main" id="{55E49167-2407-D0E6-6F4E-E3447C3F3F0A}"/>
               </a:ext>
             </a:extLst>
           </p:cNvPr>
@@ -4662,132 +4385,8 @@
         </p:nvSpPr>
         <p:spPr>
           <a:xfrm>
-            <a:off x="205483" y="3450429"/>
-            <a:ext cx="8527551" cy="261610"/>
-          </a:xfrm>
-          <a:prstGeom prst="rect">
-            <a:avLst/>
-          </a:prstGeom>
-          <a:noFill/>
-        </p:spPr>
-        <p:txBody>
-          <a:bodyPr wrap="square">
-            <a:spAutoFit/>
-          </a:bodyPr>
-          <a:lstStyle/>
-          <a:p>
-            <a:pPr marL="628650" lvl="1" indent="-171450">
-              <a:buFont typeface="Arial" panose="020B0604020202020204" pitchFamily="34" charset="0"/>
-              <a:buChar char="•"/>
-            </a:pPr>
-            <a:r>
-              <a:rPr lang="en-US" sz="1100" dirty="0">
-                <a:latin typeface="Arial" panose="020B0604020202020204" pitchFamily="34" charset="0"/>
-                <a:cs typeface="Arial" panose="020B0604020202020204" pitchFamily="34" charset="0"/>
-              </a:rPr>
-              <a:t>Decreasing the learning rate resulted in </a:t>
-            </a:r>
-            <a:r>
-              <a:rPr lang="en-US" sz="1100" dirty="0">
-                <a:solidFill>
-                  <a:srgbClr val="00B050"/>
-                </a:solidFill>
-                <a:latin typeface="Arial" panose="020B0604020202020204" pitchFamily="34" charset="0"/>
-                <a:cs typeface="Arial" panose="020B0604020202020204" pitchFamily="34" charset="0"/>
-              </a:rPr>
-              <a:t>reasonable MSE’s </a:t>
-            </a:r>
-            <a:r>
-              <a:rPr lang="en-US" sz="1100" dirty="0">
-                <a:latin typeface="Arial" panose="020B0604020202020204" pitchFamily="34" charset="0"/>
-                <a:cs typeface="Arial" panose="020B0604020202020204" pitchFamily="34" charset="0"/>
-              </a:rPr>
-              <a:t>for the full rank model</a:t>
-            </a:r>
-            <a:endParaRPr lang="en-US" sz="1100" dirty="0">
-              <a:latin typeface="Arial" panose="020B0604020202020204" pitchFamily="34" charset="0"/>
-              <a:cs typeface="Arial" panose="020B0604020202020204" pitchFamily="34" charset="0"/>
-              <a:sym typeface="Wingdings" panose="05000000000000000000" pitchFamily="2" charset="2"/>
-            </a:endParaRPr>
-          </a:p>
-        </p:txBody>
-      </p:sp>
-      <p:pic>
-        <p:nvPicPr>
-          <p:cNvPr id="10" name="Picture 9">
-            <a:extLst>
-              <a:ext uri="{FF2B5EF4-FFF2-40B4-BE49-F238E27FC236}">
-                <a16:creationId xmlns:a16="http://schemas.microsoft.com/office/drawing/2014/main" id="{D06F204C-E7DA-3581-A7A6-9033F6E02441}"/>
-              </a:ext>
-            </a:extLst>
-          </p:cNvPr>
-          <p:cNvPicPr>
-            <a:picLocks noChangeAspect="1"/>
-          </p:cNvPicPr>
-          <p:nvPr/>
-        </p:nvPicPr>
-        <p:blipFill>
-          <a:blip r:embed="rId2"/>
-          <a:stretch>
-            <a:fillRect/>
-          </a:stretch>
-        </p:blipFill>
-        <p:spPr>
-          <a:xfrm>
-            <a:off x="205483" y="1064284"/>
-            <a:ext cx="8671389" cy="1951063"/>
-          </a:xfrm>
-          <a:prstGeom prst="rect">
-            <a:avLst/>
-          </a:prstGeom>
-        </p:spPr>
-      </p:pic>
-      <p:pic>
-        <p:nvPicPr>
-          <p:cNvPr id="12" name="Picture 11" descr="A graph with lines and numbers&#10;&#10;Description automatically generated">
-            <a:extLst>
-              <a:ext uri="{FF2B5EF4-FFF2-40B4-BE49-F238E27FC236}">
-                <a16:creationId xmlns:a16="http://schemas.microsoft.com/office/drawing/2014/main" id="{1E23B024-DC94-C26F-21A9-14C0754BA6BB}"/>
-              </a:ext>
-            </a:extLst>
-          </p:cNvPr>
-          <p:cNvPicPr>
-            <a:picLocks noChangeAspect="1"/>
-          </p:cNvPicPr>
-          <p:nvPr/>
-        </p:nvPicPr>
-        <p:blipFill>
-          <a:blip r:embed="rId3"/>
-          <a:stretch>
-            <a:fillRect/>
-          </a:stretch>
-        </p:blipFill>
-        <p:spPr>
-          <a:xfrm>
-            <a:off x="205483" y="4147121"/>
-            <a:ext cx="4189038" cy="2094519"/>
-          </a:xfrm>
-          <a:prstGeom prst="rect">
-            <a:avLst/>
-          </a:prstGeom>
-        </p:spPr>
-      </p:pic>
-      <p:sp>
-        <p:nvSpPr>
-          <p:cNvPr id="13" name="TextBox 12">
-            <a:extLst>
-              <a:ext uri="{FF2B5EF4-FFF2-40B4-BE49-F238E27FC236}">
-                <a16:creationId xmlns:a16="http://schemas.microsoft.com/office/drawing/2014/main" id="{AC718EE6-FC52-F681-1DCB-6FDB6C5C92E1}"/>
-              </a:ext>
-            </a:extLst>
-          </p:cNvPr>
-          <p:cNvSpPr txBox="1"/>
-          <p:nvPr/>
-        </p:nvSpPr>
-        <p:spPr>
-          <a:xfrm>
-            <a:off x="1160979" y="3772831"/>
-            <a:ext cx="2321961" cy="553998"/>
+            <a:off x="202735" y="786078"/>
+            <a:ext cx="7972746" cy="5693866"/>
           </a:xfrm>
           <a:prstGeom prst="rect">
             <a:avLst/>
@@ -4801,115 +4400,281 @@
           <a:lstStyle/>
           <a:p>
             <a:r>
-              <a:rPr lang="en-US" sz="1000" dirty="0">
-                <a:latin typeface="Arial" panose="020B0604020202020204" pitchFamily="34" charset="0"/>
-                <a:cs typeface="Arial" panose="020B0604020202020204" pitchFamily="34" charset="0"/>
-              </a:rPr>
-              <a:t>low_rank_502_epochs_100_</a:t>
-            </a:r>
-            <a:r>
-              <a:rPr lang="en-US" sz="1000" b="1" dirty="0">
-                <a:latin typeface="Arial" panose="020B0604020202020204" pitchFamily="34" charset="0"/>
-                <a:cs typeface="Arial" panose="020B0604020202020204" pitchFamily="34" charset="0"/>
-              </a:rPr>
-              <a:t>lr_0.001</a:t>
-            </a:r>
-            <a:r>
-              <a:rPr lang="en-US" sz="1000" dirty="0">
-                <a:latin typeface="Arial" panose="020B0604020202020204" pitchFamily="34" charset="0"/>
-                <a:cs typeface="Arial" panose="020B0604020202020204" pitchFamily="34" charset="0"/>
-              </a:rPr>
-              <a:t>_lambda_0.001_k_4_init_value_on_losses</a:t>
-            </a:r>
-          </a:p>
-        </p:txBody>
-      </p:sp>
-      <p:pic>
-        <p:nvPicPr>
-          <p:cNvPr id="15" name="Picture 14" descr="A graph with a green line&#10;&#10;Description automatically generated">
-            <a:extLst>
-              <a:ext uri="{FF2B5EF4-FFF2-40B4-BE49-F238E27FC236}">
-                <a16:creationId xmlns:a16="http://schemas.microsoft.com/office/drawing/2014/main" id="{88659801-74F9-ED59-F069-8493F99249BA}"/>
-              </a:ext>
-            </a:extLst>
-          </p:cNvPr>
-          <p:cNvPicPr>
-            <a:picLocks noChangeAspect="1"/>
-          </p:cNvPicPr>
-          <p:nvPr/>
-        </p:nvPicPr>
-        <p:blipFill>
-          <a:blip r:embed="rId4"/>
-          <a:stretch>
-            <a:fillRect/>
-          </a:stretch>
-        </p:blipFill>
-        <p:spPr>
-          <a:xfrm>
-            <a:off x="4180173" y="4109752"/>
-            <a:ext cx="4263775" cy="2131888"/>
-          </a:xfrm>
-          <a:prstGeom prst="rect">
-            <a:avLst/>
-          </a:prstGeom>
-        </p:spPr>
-      </p:pic>
-      <p:sp>
-        <p:nvSpPr>
-          <p:cNvPr id="17" name="TextBox 16">
-            <a:extLst>
-              <a:ext uri="{FF2B5EF4-FFF2-40B4-BE49-F238E27FC236}">
-                <a16:creationId xmlns:a16="http://schemas.microsoft.com/office/drawing/2014/main" id="{38B14DE4-E361-6B8D-A1CD-47777FF41A2D}"/>
-              </a:ext>
-            </a:extLst>
-          </p:cNvPr>
-          <p:cNvSpPr txBox="1"/>
-          <p:nvPr/>
-        </p:nvSpPr>
-        <p:spPr>
-          <a:xfrm>
-            <a:off x="5109985" y="3789741"/>
-            <a:ext cx="2404153" cy="553998"/>
-          </a:xfrm>
-          <a:prstGeom prst="rect">
-            <a:avLst/>
-          </a:prstGeom>
-          <a:noFill/>
-        </p:spPr>
-        <p:txBody>
-          <a:bodyPr wrap="square">
-            <a:spAutoFit/>
-          </a:bodyPr>
-          <a:lstStyle/>
-          <a:p>
-            <a:r>
-              <a:rPr lang="en-US" sz="1000" dirty="0">
-                <a:latin typeface="Arial" panose="020B0604020202020204" pitchFamily="34" charset="0"/>
-                <a:cs typeface="Arial" panose="020B0604020202020204" pitchFamily="34" charset="0"/>
-              </a:rPr>
-              <a:t>low_rank_502_epochs_100_</a:t>
-            </a:r>
-            <a:r>
-              <a:rPr lang="en-US" sz="1000" b="1" dirty="0">
-                <a:latin typeface="Arial" panose="020B0604020202020204" pitchFamily="34" charset="0"/>
-                <a:cs typeface="Arial" panose="020B0604020202020204" pitchFamily="34" charset="0"/>
-              </a:rPr>
-              <a:t>lr_0.0001</a:t>
-            </a:r>
-            <a:r>
-              <a:rPr lang="en-US" sz="1000" dirty="0">
-                <a:latin typeface="Arial" panose="020B0604020202020204" pitchFamily="34" charset="0"/>
-                <a:cs typeface="Arial" panose="020B0604020202020204" pitchFamily="34" charset="0"/>
-              </a:rPr>
-              <a:t>_lambda_0.001_k_4_init_value_on_losses</a:t>
-            </a:r>
+              <a:rPr lang="en-US" sz="1400" dirty="0">
+                <a:latin typeface="Arial" panose="020B0604020202020204" pitchFamily="34" charset="0"/>
+                <a:cs typeface="Arial" panose="020B0604020202020204" pitchFamily="34" charset="0"/>
+              </a:rPr>
+              <a:t>Done/ongoing</a:t>
+            </a:r>
+          </a:p>
+          <a:p>
+            <a:pPr marL="285750" indent="-285750">
+              <a:buFont typeface="Arial" panose="020B0604020202020204" pitchFamily="34" charset="0"/>
+              <a:buChar char="•"/>
+            </a:pPr>
+            <a:r>
+              <a:rPr lang="en-US" sz="1400" dirty="0">
+                <a:latin typeface="Arial" panose="020B0604020202020204" pitchFamily="34" charset="0"/>
+                <a:cs typeface="Arial" panose="020B0604020202020204" pitchFamily="34" charset="0"/>
+              </a:rPr>
+              <a:t>Try Learning rates 1 or 2 order of magnitudes smaller for regularization to address the massive MSEs</a:t>
+            </a:r>
+          </a:p>
+          <a:p>
+            <a:pPr marL="285750" indent="-285750">
+              <a:buFont typeface="Arial" panose="020B0604020202020204" pitchFamily="34" charset="0"/>
+              <a:buChar char="•"/>
+            </a:pPr>
+            <a:r>
+              <a:rPr lang="en-US" sz="1400" dirty="0">
+                <a:latin typeface="Arial" panose="020B0604020202020204" pitchFamily="34" charset="0"/>
+                <a:cs typeface="Arial" panose="020B0604020202020204" pitchFamily="34" charset="0"/>
+              </a:rPr>
+              <a:t>Try empty initialization</a:t>
+            </a:r>
+          </a:p>
+          <a:p>
+            <a:pPr marL="285750" indent="-285750">
+              <a:buFont typeface="Arial" panose="020B0604020202020204" pitchFamily="34" charset="0"/>
+              <a:buChar char="•"/>
+            </a:pPr>
+            <a:r>
+              <a:rPr lang="en-US" sz="1400" dirty="0">
+                <a:latin typeface="Arial" panose="020B0604020202020204" pitchFamily="34" charset="0"/>
+                <a:cs typeface="Arial" panose="020B0604020202020204" pitchFamily="34" charset="0"/>
+              </a:rPr>
+              <a:t>Closed-Form Ridge Regression</a:t>
+            </a:r>
+          </a:p>
+          <a:p>
+            <a:pPr marL="742950" lvl="1" indent="-285750">
+              <a:buFont typeface="Courier New" panose="02070309020205020404" pitchFamily="49" charset="0"/>
+              <a:buChar char="o"/>
+            </a:pPr>
+            <a:r>
+              <a:rPr lang="en-US" sz="1400" dirty="0">
+                <a:latin typeface="Arial" panose="020B0604020202020204" pitchFamily="34" charset="0"/>
+                <a:cs typeface="Arial" panose="020B0604020202020204" pitchFamily="34" charset="0"/>
+              </a:rPr>
+              <a:t>Closed-Form solutions can give us assurance that the torch model should EVENTUALLY converge to this solution with enough epochs and assuming all other hyperparameters are tuned correctly</a:t>
+            </a:r>
+          </a:p>
+          <a:p>
+            <a:pPr marL="285750" indent="-285750">
+              <a:buFont typeface="Arial" panose="020B0604020202020204" pitchFamily="34" charset="0"/>
+              <a:buChar char="•"/>
+            </a:pPr>
+            <a:r>
+              <a:rPr lang="en-US" sz="1400" dirty="0">
+                <a:latin typeface="Arial" panose="020B0604020202020204" pitchFamily="34" charset="0"/>
+                <a:cs typeface="Arial" panose="020B0604020202020204" pitchFamily="34" charset="0"/>
+              </a:rPr>
+              <a:t>Make </a:t>
+            </a:r>
+            <a:r>
+              <a:rPr lang="en-US" sz="1400" dirty="0" err="1">
+                <a:latin typeface="Arial" panose="020B0604020202020204" pitchFamily="34" charset="0"/>
+                <a:cs typeface="Arial" panose="020B0604020202020204" pitchFamily="34" charset="0"/>
+              </a:rPr>
+              <a:t>Github</a:t>
+            </a:r>
+            <a:r>
+              <a:rPr lang="en-US" sz="1400" dirty="0">
+                <a:latin typeface="Arial" panose="020B0604020202020204" pitchFamily="34" charset="0"/>
+                <a:cs typeface="Arial" panose="020B0604020202020204" pitchFamily="34" charset="0"/>
+              </a:rPr>
+              <a:t> Repo</a:t>
+            </a:r>
+          </a:p>
+          <a:p>
+            <a:pPr marL="285750" indent="-285750">
+              <a:buFont typeface="Arial" panose="020B0604020202020204" pitchFamily="34" charset="0"/>
+              <a:buChar char="•"/>
+            </a:pPr>
+            <a:r>
+              <a:rPr lang="en-US" sz="1400" dirty="0">
+                <a:latin typeface="Arial" panose="020B0604020202020204" pitchFamily="34" charset="0"/>
+                <a:cs typeface="Arial" panose="020B0604020202020204" pitchFamily="34" charset="0"/>
+              </a:rPr>
+              <a:t>Effect of Regularization on Low Rank models</a:t>
+            </a:r>
+          </a:p>
+          <a:p>
+            <a:endParaRPr lang="en-US" sz="1400" dirty="0">
+              <a:latin typeface="Arial" panose="020B0604020202020204" pitchFamily="34" charset="0"/>
+              <a:cs typeface="Arial" panose="020B0604020202020204" pitchFamily="34" charset="0"/>
+            </a:endParaRPr>
+          </a:p>
+          <a:p>
+            <a:pPr marL="285750" indent="-285750">
+              <a:buFont typeface="Arial" panose="020B0604020202020204" pitchFamily="34" charset="0"/>
+              <a:buChar char="•"/>
+            </a:pPr>
+            <a:endParaRPr lang="en-US" sz="1400" dirty="0">
+              <a:latin typeface="Arial" panose="020B0604020202020204" pitchFamily="34" charset="0"/>
+              <a:cs typeface="Arial" panose="020B0604020202020204" pitchFamily="34" charset="0"/>
+            </a:endParaRPr>
+          </a:p>
+          <a:p>
+            <a:r>
+              <a:rPr lang="en-US" sz="1400" dirty="0">
+                <a:latin typeface="Arial" panose="020B0604020202020204" pitchFamily="34" charset="0"/>
+                <a:cs typeface="Arial" panose="020B0604020202020204" pitchFamily="34" charset="0"/>
+              </a:rPr>
+              <a:t>Next Steps/Direction</a:t>
+            </a:r>
+          </a:p>
+          <a:p>
+            <a:endParaRPr lang="en-US" sz="1400" dirty="0">
+              <a:latin typeface="Arial" panose="020B0604020202020204" pitchFamily="34" charset="0"/>
+              <a:cs typeface="Arial" panose="020B0604020202020204" pitchFamily="34" charset="0"/>
+            </a:endParaRPr>
+          </a:p>
+          <a:p>
+            <a:pPr marL="285750" indent="-285750">
+              <a:buFont typeface="Arial" panose="020B0604020202020204" pitchFamily="34" charset="0"/>
+              <a:buChar char="•"/>
+            </a:pPr>
+            <a:r>
+              <a:rPr lang="en-US" sz="1400" dirty="0">
+                <a:latin typeface="Arial" panose="020B0604020202020204" pitchFamily="34" charset="0"/>
+                <a:cs typeface="Arial" panose="020B0604020202020204" pitchFamily="34" charset="0"/>
+              </a:rPr>
+              <a:t>Q: If we took the closed-form W/</a:t>
+            </a:r>
+            <a:r>
+              <a:rPr lang="en-US" sz="1400" dirty="0" err="1">
+                <a:latin typeface="Arial" panose="020B0604020202020204" pitchFamily="34" charset="0"/>
+                <a:cs typeface="Arial" panose="020B0604020202020204" pitchFamily="34" charset="0"/>
+              </a:rPr>
+              <a:t>Ahat</a:t>
+            </a:r>
+            <a:r>
+              <a:rPr lang="en-US" sz="1400" dirty="0">
+                <a:latin typeface="Arial" panose="020B0604020202020204" pitchFamily="34" charset="0"/>
+                <a:cs typeface="Arial" panose="020B0604020202020204" pitchFamily="34" charset="0"/>
+              </a:rPr>
+              <a:t> which is (502,4017), did SVD with rank 502 on it, then initialized the torch model with that </a:t>
+            </a:r>
+            <a:r>
+              <a:rPr lang="en-US" sz="1400" dirty="0" err="1">
+                <a:latin typeface="Arial" panose="020B0604020202020204" pitchFamily="34" charset="0"/>
+                <a:cs typeface="Arial" panose="020B0604020202020204" pitchFamily="34" charset="0"/>
+              </a:rPr>
+              <a:t>SVD’d</a:t>
+            </a:r>
+            <a:r>
+              <a:rPr lang="en-US" sz="1400" dirty="0">
+                <a:latin typeface="Arial" panose="020B0604020202020204" pitchFamily="34" charset="0"/>
+                <a:cs typeface="Arial" panose="020B0604020202020204" pitchFamily="34" charset="0"/>
+              </a:rPr>
+              <a:t> init_value I expect and want it to stay at the closed-form, It bothers me that it doesn’t.</a:t>
+            </a:r>
+          </a:p>
+          <a:p>
+            <a:endParaRPr lang="en-US" sz="1400" dirty="0">
+              <a:latin typeface="Arial" panose="020B0604020202020204" pitchFamily="34" charset="0"/>
+              <a:cs typeface="Arial" panose="020B0604020202020204" pitchFamily="34" charset="0"/>
+            </a:endParaRPr>
+          </a:p>
+          <a:p>
+            <a:pPr marL="285750" indent="-285750">
+              <a:buFont typeface="Arial" panose="020B0604020202020204" pitchFamily="34" charset="0"/>
+              <a:buChar char="•"/>
+            </a:pPr>
+            <a:r>
+              <a:rPr lang="en-US" sz="1400" dirty="0">
+                <a:latin typeface="Arial" panose="020B0604020202020204" pitchFamily="34" charset="0"/>
+                <a:cs typeface="Arial" panose="020B0604020202020204" pitchFamily="34" charset="0"/>
+              </a:rPr>
+              <a:t>Take Reduced Rank Ridge Regression closed-form solutions, initialize torch model with that and confirm that the model stays at that closed-form solution.</a:t>
+            </a:r>
+          </a:p>
+          <a:p>
+            <a:pPr marL="285750" indent="-285750">
+              <a:buFont typeface="Arial" panose="020B0604020202020204" pitchFamily="34" charset="0"/>
+              <a:buChar char="•"/>
+            </a:pPr>
+            <a:r>
+              <a:rPr lang="en-US" sz="1400" dirty="0">
+                <a:latin typeface="Arial" panose="020B0604020202020204" pitchFamily="34" charset="0"/>
+                <a:cs typeface="Arial" panose="020B0604020202020204" pitchFamily="34" charset="0"/>
+              </a:rPr>
+              <a:t>Nested cross validation loop – Joe Lambda first, then rank</a:t>
+            </a:r>
+          </a:p>
+          <a:p>
+            <a:pPr marL="285750" indent="-285750">
+              <a:buFont typeface="Arial" panose="020B0604020202020204" pitchFamily="34" charset="0"/>
+              <a:buChar char="•"/>
+            </a:pPr>
+            <a:r>
+              <a:rPr lang="en-US" sz="1400" dirty="0">
+                <a:latin typeface="Arial" panose="020B0604020202020204" pitchFamily="34" charset="0"/>
+                <a:cs typeface="Arial" panose="020B0604020202020204" pitchFamily="34" charset="0"/>
+              </a:rPr>
+              <a:t>Closed form training MSE for reduced ridge regression, compare to torch reg train loss, torch reg train loss should eventually arrive to this</a:t>
+            </a:r>
+          </a:p>
+          <a:p>
+            <a:endParaRPr lang="en-US" sz="1400" dirty="0">
+              <a:latin typeface="Arial" panose="020B0604020202020204" pitchFamily="34" charset="0"/>
+              <a:cs typeface="Arial" panose="020B0604020202020204" pitchFamily="34" charset="0"/>
+            </a:endParaRPr>
+          </a:p>
+          <a:p>
+            <a:pPr marL="285750" indent="-285750">
+              <a:buFont typeface="Arial" panose="020B0604020202020204" pitchFamily="34" charset="0"/>
+              <a:buChar char="•"/>
+            </a:pPr>
+            <a:r>
+              <a:rPr lang="en-US" sz="1400" dirty="0">
+                <a:latin typeface="Arial" panose="020B0604020202020204" pitchFamily="34" charset="0"/>
+                <a:cs typeface="Arial" panose="020B0604020202020204" pitchFamily="34" charset="0"/>
+              </a:rPr>
+              <a:t>Gradient Descent w/ rollout vs current approach (predict 4 </a:t>
+            </a:r>
+            <a:r>
+              <a:rPr lang="en-US" sz="1400" dirty="0" err="1">
+                <a:latin typeface="Arial" panose="020B0604020202020204" pitchFamily="34" charset="0"/>
+                <a:cs typeface="Arial" panose="020B0604020202020204" pitchFamily="34" charset="0"/>
+              </a:rPr>
+              <a:t>x_next</a:t>
+            </a:r>
+            <a:r>
+              <a:rPr lang="en-US" sz="1400" dirty="0">
+                <a:latin typeface="Arial" panose="020B0604020202020204" pitchFamily="34" charset="0"/>
+                <a:cs typeface="Arial" panose="020B0604020202020204" pitchFamily="34" charset="0"/>
+              </a:rPr>
+              <a:t>, instead of 1 </a:t>
+            </a:r>
+            <a:r>
+              <a:rPr lang="en-US" sz="1400" dirty="0" err="1">
+                <a:latin typeface="Arial" panose="020B0604020202020204" pitchFamily="34" charset="0"/>
+                <a:cs typeface="Arial" panose="020B0604020202020204" pitchFamily="34" charset="0"/>
+              </a:rPr>
+              <a:t>x_next</a:t>
+            </a:r>
+            <a:r>
+              <a:rPr lang="en-US" sz="1400" dirty="0">
+                <a:latin typeface="Arial" panose="020B0604020202020204" pitchFamily="34" charset="0"/>
+                <a:cs typeface="Arial" panose="020B0604020202020204" pitchFamily="34" charset="0"/>
+              </a:rPr>
+              <a:t>)</a:t>
+            </a:r>
+          </a:p>
+          <a:p>
+            <a:endParaRPr lang="en-US" sz="1400" dirty="0">
+              <a:latin typeface="Arial" panose="020B0604020202020204" pitchFamily="34" charset="0"/>
+              <a:cs typeface="Arial" panose="020B0604020202020204" pitchFamily="34" charset="0"/>
+            </a:endParaRPr>
           </a:p>
         </p:txBody>
       </p:sp>
     </p:spTree>
     <p:extLst>
       <p:ext uri="{BB962C8B-B14F-4D97-AF65-F5344CB8AC3E}">
-        <p14:creationId xmlns:p14="http://schemas.microsoft.com/office/powerpoint/2010/main" val="3188592842"/>
+        <p14:creationId xmlns:p14="http://schemas.microsoft.com/office/powerpoint/2010/main" val="4242679506"/>
       </p:ext>
     </p:extLst>
   </p:cSld>
@@ -4996,12 +4761,114 @@
           <a:chExt cx="0" cy="0"/>
         </a:xfrm>
       </p:grpSpPr>
+      <p:sp>
+        <p:nvSpPr>
+          <p:cNvPr id="6" name="TextBox 5">
+            <a:extLst>
+              <a:ext uri="{FF2B5EF4-FFF2-40B4-BE49-F238E27FC236}">
+                <a16:creationId xmlns:a16="http://schemas.microsoft.com/office/drawing/2014/main" id="{B8A72ACA-1126-A591-65FB-6F516617AA73}"/>
+              </a:ext>
+            </a:extLst>
+          </p:cNvPr>
+          <p:cNvSpPr txBox="1"/>
+          <p:nvPr/>
+        </p:nvSpPr>
+        <p:spPr>
+          <a:xfrm>
+            <a:off x="281758" y="320735"/>
+            <a:ext cx="5744137" cy="461665"/>
+          </a:xfrm>
+          <a:prstGeom prst="rect">
+            <a:avLst/>
+          </a:prstGeom>
+          <a:noFill/>
+        </p:spPr>
+        <p:txBody>
+          <a:bodyPr wrap="square">
+            <a:spAutoFit/>
+          </a:bodyPr>
+          <a:lstStyle/>
+          <a:p>
+            <a:r>
+              <a:rPr lang="en-US" sz="2400" b="1" dirty="0">
+                <a:latin typeface="Arial" panose="020B0604020202020204" pitchFamily="34" charset="0"/>
+                <a:cs typeface="Arial" panose="020B0604020202020204" pitchFamily="34" charset="0"/>
+              </a:rPr>
+              <a:t>Extremely high MSE?</a:t>
+            </a:r>
+          </a:p>
+        </p:txBody>
+      </p:sp>
+      <p:sp>
+        <p:nvSpPr>
+          <p:cNvPr id="8" name="TextBox 7">
+            <a:extLst>
+              <a:ext uri="{FF2B5EF4-FFF2-40B4-BE49-F238E27FC236}">
+                <a16:creationId xmlns:a16="http://schemas.microsoft.com/office/drawing/2014/main" id="{EADD84AF-CA8E-9821-FA4D-447C01A75360}"/>
+              </a:ext>
+            </a:extLst>
+          </p:cNvPr>
+          <p:cNvSpPr txBox="1"/>
+          <p:nvPr/>
+        </p:nvSpPr>
+        <p:spPr>
+          <a:xfrm>
+            <a:off x="205483" y="3450429"/>
+            <a:ext cx="8527551" cy="261610"/>
+          </a:xfrm>
+          <a:prstGeom prst="rect">
+            <a:avLst/>
+          </a:prstGeom>
+          <a:noFill/>
+        </p:spPr>
+        <p:txBody>
+          <a:bodyPr wrap="square">
+            <a:spAutoFit/>
+          </a:bodyPr>
+          <a:lstStyle/>
+          <a:p>
+            <a:pPr marL="628650" lvl="1" indent="-171450">
+              <a:buFont typeface="Arial" panose="020B0604020202020204" pitchFamily="34" charset="0"/>
+              <a:buChar char="•"/>
+            </a:pPr>
+            <a:r>
+              <a:rPr lang="en-US" sz="1100" dirty="0">
+                <a:latin typeface="Arial" panose="020B0604020202020204" pitchFamily="34" charset="0"/>
+                <a:cs typeface="Arial" panose="020B0604020202020204" pitchFamily="34" charset="0"/>
+              </a:rPr>
+              <a:t>Decreasing the learning rate resulted in </a:t>
+            </a:r>
+            <a:r>
+              <a:rPr lang="en-US" sz="1100" dirty="0">
+                <a:solidFill>
+                  <a:srgbClr val="00B050"/>
+                </a:solidFill>
+                <a:latin typeface="Arial" panose="020B0604020202020204" pitchFamily="34" charset="0"/>
+                <a:cs typeface="Arial" panose="020B0604020202020204" pitchFamily="34" charset="0"/>
+              </a:rPr>
+              <a:t>reasonable MSE’s </a:t>
+            </a:r>
+            <a:r>
+              <a:rPr lang="en-US" sz="1100" dirty="0">
+                <a:latin typeface="Arial" panose="020B0604020202020204" pitchFamily="34" charset="0"/>
+                <a:cs typeface="Arial" panose="020B0604020202020204" pitchFamily="34" charset="0"/>
+              </a:rPr>
+              <a:t>for the full rank model</a:t>
+            </a:r>
+            <a:endParaRPr lang="en-US" sz="1100" dirty="0">
+              <a:latin typeface="Arial" panose="020B0604020202020204" pitchFamily="34" charset="0"/>
+              <a:cs typeface="Arial" panose="020B0604020202020204" pitchFamily="34" charset="0"/>
+              <a:sym typeface="Wingdings" panose="05000000000000000000" pitchFamily="2" charset="2"/>
+            </a:endParaRPr>
+          </a:p>
+        </p:txBody>
+      </p:sp>
       <p:pic>
         <p:nvPicPr>
-          <p:cNvPr id="13" name="Picture 12">
+          <p:cNvPr id="10" name="Picture 9">
             <a:extLst>
               <a:ext uri="{FF2B5EF4-FFF2-40B4-BE49-F238E27FC236}">
-                <a16:creationId xmlns:a16="http://schemas.microsoft.com/office/drawing/2014/main" id="{1BC176F3-1054-A552-E343-12B1AFF89D83}"/>
+                <a16:creationId xmlns:a16="http://schemas.microsoft.com/office/drawing/2014/main" id="{D06F204C-E7DA-3581-A7A6-9033F6E02441}"/>
               </a:ext>
             </a:extLst>
           </p:cNvPr>
@@ -5018,8 +4885,8 @@
         </p:blipFill>
         <p:spPr>
           <a:xfrm>
-            <a:off x="692215" y="3605714"/>
-            <a:ext cx="7445385" cy="2110923"/>
+            <a:off x="205483" y="1064284"/>
+            <a:ext cx="8671389" cy="1951063"/>
           </a:xfrm>
           <a:prstGeom prst="rect">
             <a:avLst/>
@@ -5028,10 +4895,10 @@
       </p:pic>
       <p:pic>
         <p:nvPicPr>
-          <p:cNvPr id="7" name="Picture 6">
+          <p:cNvPr id="12" name="Picture 11" descr="A graph with lines and numbers&#10;&#10;Description automatically generated">
             <a:extLst>
               <a:ext uri="{FF2B5EF4-FFF2-40B4-BE49-F238E27FC236}">
-                <a16:creationId xmlns:a16="http://schemas.microsoft.com/office/drawing/2014/main" id="{D6F45D4D-09F0-920B-2ED0-89E31226C3BB}"/>
+                <a16:creationId xmlns:a16="http://schemas.microsoft.com/office/drawing/2014/main" id="{1E23B024-DC94-C26F-21A9-14C0754BA6BB}"/>
               </a:ext>
             </a:extLst>
           </p:cNvPr>
@@ -5048,18 +4915,152 @@
         </p:blipFill>
         <p:spPr>
           <a:xfrm>
-            <a:off x="762444" y="1674387"/>
-            <a:ext cx="7304926" cy="1931327"/>
+            <a:off x="205483" y="4147121"/>
+            <a:ext cx="4189038" cy="2094519"/>
           </a:xfrm>
           <a:prstGeom prst="rect">
             <a:avLst/>
           </a:prstGeom>
         </p:spPr>
       </p:pic>
+      <p:sp>
+        <p:nvSpPr>
+          <p:cNvPr id="13" name="TextBox 12">
+            <a:extLst>
+              <a:ext uri="{FF2B5EF4-FFF2-40B4-BE49-F238E27FC236}">
+                <a16:creationId xmlns:a16="http://schemas.microsoft.com/office/drawing/2014/main" id="{AC718EE6-FC52-F681-1DCB-6FDB6C5C92E1}"/>
+              </a:ext>
+            </a:extLst>
+          </p:cNvPr>
+          <p:cNvSpPr txBox="1"/>
+          <p:nvPr/>
+        </p:nvSpPr>
+        <p:spPr>
+          <a:xfrm>
+            <a:off x="1160979" y="3772831"/>
+            <a:ext cx="2321961" cy="553998"/>
+          </a:xfrm>
+          <a:prstGeom prst="rect">
+            <a:avLst/>
+          </a:prstGeom>
+          <a:noFill/>
+        </p:spPr>
+        <p:txBody>
+          <a:bodyPr wrap="square" rtlCol="0">
+            <a:spAutoFit/>
+          </a:bodyPr>
+          <a:lstStyle/>
+          <a:p>
+            <a:r>
+              <a:rPr lang="en-US" sz="1000" dirty="0">
+                <a:latin typeface="Arial" panose="020B0604020202020204" pitchFamily="34" charset="0"/>
+                <a:cs typeface="Arial" panose="020B0604020202020204" pitchFamily="34" charset="0"/>
+              </a:rPr>
+              <a:t>low_rank_502_epochs_100_</a:t>
+            </a:r>
+            <a:r>
+              <a:rPr lang="en-US" sz="1000" b="1" dirty="0">
+                <a:latin typeface="Arial" panose="020B0604020202020204" pitchFamily="34" charset="0"/>
+                <a:cs typeface="Arial" panose="020B0604020202020204" pitchFamily="34" charset="0"/>
+              </a:rPr>
+              <a:t>lr_0.001</a:t>
+            </a:r>
+            <a:r>
+              <a:rPr lang="en-US" sz="1000" dirty="0">
+                <a:latin typeface="Arial" panose="020B0604020202020204" pitchFamily="34" charset="0"/>
+                <a:cs typeface="Arial" panose="020B0604020202020204" pitchFamily="34" charset="0"/>
+              </a:rPr>
+              <a:t>_lambda_0.001_k_4_init_value_on_losses</a:t>
+            </a:r>
+          </a:p>
+        </p:txBody>
+      </p:sp>
+      <p:pic>
+        <p:nvPicPr>
+          <p:cNvPr id="15" name="Picture 14" descr="A graph with a green line&#10;&#10;Description automatically generated">
+            <a:extLst>
+              <a:ext uri="{FF2B5EF4-FFF2-40B4-BE49-F238E27FC236}">
+                <a16:creationId xmlns:a16="http://schemas.microsoft.com/office/drawing/2014/main" id="{88659801-74F9-ED59-F069-8493F99249BA}"/>
+              </a:ext>
+            </a:extLst>
+          </p:cNvPr>
+          <p:cNvPicPr>
+            <a:picLocks noChangeAspect="1"/>
+          </p:cNvPicPr>
+          <p:nvPr/>
+        </p:nvPicPr>
+        <p:blipFill>
+          <a:blip r:embed="rId4"/>
+          <a:stretch>
+            <a:fillRect/>
+          </a:stretch>
+        </p:blipFill>
+        <p:spPr>
+          <a:xfrm>
+            <a:off x="4180173" y="4109752"/>
+            <a:ext cx="4263775" cy="2131888"/>
+          </a:xfrm>
+          <a:prstGeom prst="rect">
+            <a:avLst/>
+          </a:prstGeom>
+        </p:spPr>
+      </p:pic>
+      <p:sp>
+        <p:nvSpPr>
+          <p:cNvPr id="17" name="TextBox 16">
+            <a:extLst>
+              <a:ext uri="{FF2B5EF4-FFF2-40B4-BE49-F238E27FC236}">
+                <a16:creationId xmlns:a16="http://schemas.microsoft.com/office/drawing/2014/main" id="{38B14DE4-E361-6B8D-A1CD-47777FF41A2D}"/>
+              </a:ext>
+            </a:extLst>
+          </p:cNvPr>
+          <p:cNvSpPr txBox="1"/>
+          <p:nvPr/>
+        </p:nvSpPr>
+        <p:spPr>
+          <a:xfrm>
+            <a:off x="5109985" y="3789741"/>
+            <a:ext cx="2404153" cy="553998"/>
+          </a:xfrm>
+          <a:prstGeom prst="rect">
+            <a:avLst/>
+          </a:prstGeom>
+          <a:noFill/>
+        </p:spPr>
+        <p:txBody>
+          <a:bodyPr wrap="square">
+            <a:spAutoFit/>
+          </a:bodyPr>
+          <a:lstStyle/>
+          <a:p>
+            <a:r>
+              <a:rPr lang="en-US" sz="1000" dirty="0">
+                <a:latin typeface="Arial" panose="020B0604020202020204" pitchFamily="34" charset="0"/>
+                <a:cs typeface="Arial" panose="020B0604020202020204" pitchFamily="34" charset="0"/>
+              </a:rPr>
+              <a:t>low_rank_502_epochs_100_</a:t>
+            </a:r>
+            <a:r>
+              <a:rPr lang="en-US" sz="1000" b="1" dirty="0">
+                <a:latin typeface="Arial" panose="020B0604020202020204" pitchFamily="34" charset="0"/>
+                <a:cs typeface="Arial" panose="020B0604020202020204" pitchFamily="34" charset="0"/>
+              </a:rPr>
+              <a:t>lr_0.0001</a:t>
+            </a:r>
+            <a:r>
+              <a:rPr lang="en-US" sz="1000" dirty="0">
+                <a:latin typeface="Arial" panose="020B0604020202020204" pitchFamily="34" charset="0"/>
+                <a:cs typeface="Arial" panose="020B0604020202020204" pitchFamily="34" charset="0"/>
+              </a:rPr>
+              <a:t>_lambda_0.001_k_4_init_value_on_losses</a:t>
+            </a:r>
+          </a:p>
+        </p:txBody>
+      </p:sp>
     </p:spTree>
     <p:extLst>
       <p:ext uri="{BB962C8B-B14F-4D97-AF65-F5344CB8AC3E}">
-        <p14:creationId xmlns:p14="http://schemas.microsoft.com/office/powerpoint/2010/main" val="4089941250"/>
+        <p14:creationId xmlns:p14="http://schemas.microsoft.com/office/powerpoint/2010/main" val="3188592842"/>
       </p:ext>
     </p:extLst>
   </p:cSld>
@@ -5086,206 +5087,12 @@
           <a:chExt cx="0" cy="0"/>
         </a:xfrm>
       </p:grpSpPr>
-      <p:sp>
-        <p:nvSpPr>
-          <p:cNvPr id="6" name="TextBox 5">
-            <a:extLst>
-              <a:ext uri="{FF2B5EF4-FFF2-40B4-BE49-F238E27FC236}">
-                <a16:creationId xmlns:a16="http://schemas.microsoft.com/office/drawing/2014/main" id="{257CBF21-DD14-664C-D524-6FF0C80C9A10}"/>
-              </a:ext>
-            </a:extLst>
-          </p:cNvPr>
-          <p:cNvSpPr txBox="1"/>
-          <p:nvPr/>
-        </p:nvSpPr>
-        <p:spPr>
-          <a:xfrm>
-            <a:off x="281758" y="320735"/>
-            <a:ext cx="6108768" cy="461665"/>
-          </a:xfrm>
-          <a:prstGeom prst="rect">
-            <a:avLst/>
-          </a:prstGeom>
-          <a:noFill/>
-        </p:spPr>
-        <p:txBody>
-          <a:bodyPr wrap="square">
-            <a:spAutoFit/>
-          </a:bodyPr>
-          <a:lstStyle/>
-          <a:p>
-            <a:r>
-              <a:rPr lang="en-US" sz="2400" b="1" dirty="0">
-                <a:latin typeface="Arial" panose="020B0604020202020204" pitchFamily="34" charset="0"/>
-                <a:cs typeface="Arial" panose="020B0604020202020204" pitchFamily="34" charset="0"/>
-              </a:rPr>
-              <a:t>Difference between Val and “Test” MSE</a:t>
-            </a:r>
-          </a:p>
-        </p:txBody>
-      </p:sp>
-      <p:sp>
-        <p:nvSpPr>
-          <p:cNvPr id="12" name="TextBox 11">
-            <a:extLst>
-              <a:ext uri="{FF2B5EF4-FFF2-40B4-BE49-F238E27FC236}">
-                <a16:creationId xmlns:a16="http://schemas.microsoft.com/office/drawing/2014/main" id="{FC6D1283-C626-9250-F5B5-541F038ABBD0}"/>
-              </a:ext>
-            </a:extLst>
-          </p:cNvPr>
-          <p:cNvSpPr txBox="1"/>
-          <p:nvPr/>
-        </p:nvSpPr>
-        <p:spPr>
-          <a:xfrm>
-            <a:off x="547240" y="1556216"/>
-            <a:ext cx="6421175" cy="1815882"/>
-          </a:xfrm>
-          <a:prstGeom prst="rect">
-            <a:avLst/>
-          </a:prstGeom>
-          <a:noFill/>
-        </p:spPr>
-        <p:txBody>
-          <a:bodyPr wrap="square" rtlCol="0">
-            <a:spAutoFit/>
-          </a:bodyPr>
-          <a:lstStyle/>
-          <a:p>
-            <a:pPr marL="285750" indent="-285750">
-              <a:buFont typeface="Arial" panose="020B0604020202020204" pitchFamily="34" charset="0"/>
-              <a:buChar char="•"/>
-            </a:pPr>
-            <a:r>
-              <a:rPr lang="en-US" sz="1400" dirty="0">
-                <a:latin typeface="Arial" panose="020B0604020202020204" pitchFamily="34" charset="0"/>
-                <a:cs typeface="Arial" panose="020B0604020202020204" pitchFamily="34" charset="0"/>
-              </a:rPr>
-              <a:t>12 batches of ~2000 for </a:t>
-            </a:r>
-            <a:r>
-              <a:rPr lang="en-US" sz="1400" dirty="0" err="1">
-                <a:latin typeface="Arial" panose="020B0604020202020204" pitchFamily="34" charset="0"/>
-                <a:cs typeface="Arial" panose="020B0604020202020204" pitchFamily="34" charset="0"/>
-              </a:rPr>
-              <a:t>train_loader</a:t>
-            </a:r>
-            <a:r>
-              <a:rPr lang="en-US" sz="1400" dirty="0">
-                <a:latin typeface="Arial" panose="020B0604020202020204" pitchFamily="34" charset="0"/>
-                <a:cs typeface="Arial" panose="020B0604020202020204" pitchFamily="34" charset="0"/>
-              </a:rPr>
-              <a:t>, 4 batches of ~2000 for </a:t>
-            </a:r>
-            <a:r>
-              <a:rPr lang="en-US" sz="1400" dirty="0" err="1">
-                <a:latin typeface="Arial" panose="020B0604020202020204" pitchFamily="34" charset="0"/>
-                <a:cs typeface="Arial" panose="020B0604020202020204" pitchFamily="34" charset="0"/>
-              </a:rPr>
-              <a:t>val_loader</a:t>
-            </a:r>
-            <a:r>
-              <a:rPr lang="en-US" sz="1400" dirty="0">
-                <a:latin typeface="Arial" panose="020B0604020202020204" pitchFamily="34" charset="0"/>
-                <a:cs typeface="Arial" panose="020B0604020202020204" pitchFamily="34" charset="0"/>
-              </a:rPr>
-              <a:t> </a:t>
-            </a:r>
-            <a:r>
-              <a:rPr lang="en-US" sz="1400" dirty="0">
-                <a:latin typeface="Arial" panose="020B0604020202020204" pitchFamily="34" charset="0"/>
-                <a:cs typeface="Arial" panose="020B0604020202020204" pitchFamily="34" charset="0"/>
-                <a:sym typeface="Wingdings" panose="05000000000000000000" pitchFamily="2" charset="2"/>
-              </a:rPr>
-              <a:t> 24000~22968 training t’s, 8000~6340 test t’s</a:t>
-            </a:r>
-          </a:p>
-          <a:p>
-            <a:pPr marL="285750" indent="-285750">
-              <a:buFont typeface="Arial" panose="020B0604020202020204" pitchFamily="34" charset="0"/>
-              <a:buChar char="•"/>
-            </a:pPr>
-            <a:r>
-              <a:rPr lang="en-US" sz="1400" dirty="0">
-                <a:latin typeface="Arial" panose="020B0604020202020204" pitchFamily="34" charset="0"/>
-                <a:cs typeface="Arial" panose="020B0604020202020204" pitchFamily="34" charset="0"/>
-                <a:sym typeface="Wingdings" panose="05000000000000000000" pitchFamily="2" charset="2"/>
-              </a:rPr>
-              <a:t>Test and </a:t>
-            </a:r>
-            <a:r>
-              <a:rPr lang="en-US" sz="1400" dirty="0" err="1">
-                <a:latin typeface="Arial" panose="020B0604020202020204" pitchFamily="34" charset="0"/>
-                <a:cs typeface="Arial" panose="020B0604020202020204" pitchFamily="34" charset="0"/>
-                <a:sym typeface="Wingdings" panose="05000000000000000000" pitchFamily="2" charset="2"/>
-              </a:rPr>
-              <a:t>val</a:t>
-            </a:r>
-            <a:r>
-              <a:rPr lang="en-US" sz="1400" dirty="0">
-                <a:latin typeface="Arial" panose="020B0604020202020204" pitchFamily="34" charset="0"/>
-                <a:cs typeface="Arial" panose="020B0604020202020204" pitchFamily="34" charset="0"/>
-                <a:sym typeface="Wingdings" panose="05000000000000000000" pitchFamily="2" charset="2"/>
-              </a:rPr>
-              <a:t> MSE uses same t’s</a:t>
-            </a:r>
-          </a:p>
-          <a:p>
-            <a:pPr marL="742950" lvl="1" indent="-285750">
-              <a:buFont typeface="Courier New" panose="02070309020205020404" pitchFamily="49" charset="0"/>
-              <a:buChar char="o"/>
-            </a:pPr>
-            <a:r>
-              <a:rPr lang="en-US" sz="1400" dirty="0">
-                <a:latin typeface="Arial" panose="020B0604020202020204" pitchFamily="34" charset="0"/>
-                <a:cs typeface="Arial" panose="020B0604020202020204" pitchFamily="34" charset="0"/>
-                <a:sym typeface="Wingdings" panose="05000000000000000000" pitchFamily="2" charset="2"/>
-              </a:rPr>
-              <a:t>Train MSE is the average of 12 batches of 2000 error</a:t>
-            </a:r>
-          </a:p>
-          <a:p>
-            <a:pPr marL="742950" lvl="1" indent="-285750">
-              <a:buFont typeface="Courier New" panose="02070309020205020404" pitchFamily="49" charset="0"/>
-              <a:buChar char="o"/>
-            </a:pPr>
-            <a:r>
-              <a:rPr lang="en-US" sz="1400" dirty="0">
-                <a:latin typeface="Arial" panose="020B0604020202020204" pitchFamily="34" charset="0"/>
-                <a:cs typeface="Arial" panose="020B0604020202020204" pitchFamily="34" charset="0"/>
-                <a:sym typeface="Wingdings" panose="05000000000000000000" pitchFamily="2" charset="2"/>
-              </a:rPr>
-              <a:t>Val MSE is the average MSE of 4 batches of 2000 error</a:t>
-            </a:r>
-          </a:p>
-          <a:p>
-            <a:pPr marL="742950" lvl="1" indent="-285750">
-              <a:buFont typeface="Courier New" panose="02070309020205020404" pitchFamily="49" charset="0"/>
-              <a:buChar char="o"/>
-            </a:pPr>
-            <a:r>
-              <a:rPr lang="en-US" sz="1400" dirty="0">
-                <a:latin typeface="Arial" panose="020B0604020202020204" pitchFamily="34" charset="0"/>
-                <a:cs typeface="Arial" panose="020B0604020202020204" pitchFamily="34" charset="0"/>
-                <a:sym typeface="Wingdings" panose="05000000000000000000" pitchFamily="2" charset="2"/>
-              </a:rPr>
-              <a:t>Test MSE is the average MSE of 82 segments of uninterrupted test t’s which vary in length (66, 109 etc.)</a:t>
-            </a:r>
-          </a:p>
-          <a:p>
-            <a:endParaRPr lang="en-US" sz="1400" dirty="0">
-              <a:latin typeface="Arial" panose="020B0604020202020204" pitchFamily="34" charset="0"/>
-              <a:cs typeface="Arial" panose="020B0604020202020204" pitchFamily="34" charset="0"/>
-            </a:endParaRPr>
-          </a:p>
-        </p:txBody>
-      </p:sp>
       <p:pic>
         <p:nvPicPr>
-          <p:cNvPr id="10" name="Picture 9">
+          <p:cNvPr id="13" name="Picture 12">
             <a:extLst>
               <a:ext uri="{FF2B5EF4-FFF2-40B4-BE49-F238E27FC236}">
-                <a16:creationId xmlns:a16="http://schemas.microsoft.com/office/drawing/2014/main" id="{081C64A3-3F28-BC95-961B-D076AE405641}"/>
+                <a16:creationId xmlns:a16="http://schemas.microsoft.com/office/drawing/2014/main" id="{1BC176F3-1054-A552-E343-12B1AFF89D83}"/>
               </a:ext>
             </a:extLst>
           </p:cNvPr>
@@ -5302,8 +5109,8 @@
         </p:blipFill>
         <p:spPr>
           <a:xfrm>
-            <a:off x="5432264" y="3171562"/>
-            <a:ext cx="3305172" cy="2198323"/>
+            <a:off x="692215" y="3605714"/>
+            <a:ext cx="7445385" cy="2110923"/>
           </a:xfrm>
           <a:prstGeom prst="rect">
             <a:avLst/>
@@ -5312,10 +5119,10 @@
       </p:pic>
       <p:pic>
         <p:nvPicPr>
-          <p:cNvPr id="16" name="Picture 15">
+          <p:cNvPr id="7" name="Picture 6">
             <a:extLst>
               <a:ext uri="{FF2B5EF4-FFF2-40B4-BE49-F238E27FC236}">
-                <a16:creationId xmlns:a16="http://schemas.microsoft.com/office/drawing/2014/main" id="{C2808A60-7522-62E8-7078-C563B6A6AC57}"/>
+                <a16:creationId xmlns:a16="http://schemas.microsoft.com/office/drawing/2014/main" id="{D6F45D4D-09F0-920B-2ED0-89E31226C3BB}"/>
               </a:ext>
             </a:extLst>
           </p:cNvPr>
@@ -5332,8 +5139,8 @@
         </p:blipFill>
         <p:spPr>
           <a:xfrm>
-            <a:off x="203984" y="3156654"/>
-            <a:ext cx="4749173" cy="1865481"/>
+            <a:off x="762444" y="1674387"/>
+            <a:ext cx="7304926" cy="1931327"/>
           </a:xfrm>
           <a:prstGeom prst="rect">
             <a:avLst/>
@@ -5343,7 +5150,7 @@
     </p:spTree>
     <p:extLst>
       <p:ext uri="{BB962C8B-B14F-4D97-AF65-F5344CB8AC3E}">
-        <p14:creationId xmlns:p14="http://schemas.microsoft.com/office/powerpoint/2010/main" val="436604750"/>
+        <p14:creationId xmlns:p14="http://schemas.microsoft.com/office/powerpoint/2010/main" val="4089941250"/>
       </p:ext>
     </p:extLst>
   </p:cSld>
@@ -5385,7 +5192,7 @@
         <p:spPr>
           <a:xfrm>
             <a:off x="281758" y="320735"/>
-            <a:ext cx="5744137" cy="461665"/>
+            <a:ext cx="6108768" cy="461665"/>
           </a:xfrm>
           <a:prstGeom prst="rect">
             <a:avLst/>
@@ -5403,17 +5210,17 @@
                 <a:latin typeface="Arial" panose="020B0604020202020204" pitchFamily="34" charset="0"/>
                 <a:cs typeface="Arial" panose="020B0604020202020204" pitchFamily="34" charset="0"/>
               </a:rPr>
-              <a:t>Test MSE</a:t>
+              <a:t>Difference between Val and “Test” MSE</a:t>
             </a:r>
           </a:p>
         </p:txBody>
       </p:sp>
       <p:sp>
         <p:nvSpPr>
-          <p:cNvPr id="7" name="TextBox 6">
+          <p:cNvPr id="12" name="TextBox 11">
             <a:extLst>
               <a:ext uri="{FF2B5EF4-FFF2-40B4-BE49-F238E27FC236}">
-                <a16:creationId xmlns:a16="http://schemas.microsoft.com/office/drawing/2014/main" id="{4E25EA88-E729-4826-C6DD-90454AE0ABB8}"/>
+                <a16:creationId xmlns:a16="http://schemas.microsoft.com/office/drawing/2014/main" id="{FC6D1283-C626-9250-F5B5-541F038ABBD0}"/>
               </a:ext>
             </a:extLst>
           </p:cNvPr>
@@ -5422,8 +5229,8 @@
         </p:nvSpPr>
         <p:spPr>
           <a:xfrm>
-            <a:off x="428978" y="1670756"/>
-            <a:ext cx="8195733" cy="523220"/>
+            <a:off x="547240" y="1556216"/>
+            <a:ext cx="6421175" cy="1815882"/>
           </a:xfrm>
           <a:prstGeom prst="rect">
             <a:avLst/>
@@ -5436,19 +5243,124 @@
           </a:bodyPr>
           <a:lstStyle/>
           <a:p>
+            <a:pPr marL="285750" indent="-285750">
+              <a:buFont typeface="Arial" panose="020B0604020202020204" pitchFamily="34" charset="0"/>
+              <a:buChar char="•"/>
+            </a:pPr>
+            <a:r>
+              <a:rPr lang="en-US" sz="1400" dirty="0">
+                <a:latin typeface="Arial" panose="020B0604020202020204" pitchFamily="34" charset="0"/>
+                <a:cs typeface="Arial" panose="020B0604020202020204" pitchFamily="34" charset="0"/>
+              </a:rPr>
+              <a:t>12 batches of ~2000 for </a:t>
+            </a:r>
             <a:r>
               <a:rPr lang="en-US" sz="1400" dirty="0" err="1">
                 <a:latin typeface="Arial" panose="020B0604020202020204" pitchFamily="34" charset="0"/>
                 <a:cs typeface="Arial" panose="020B0604020202020204" pitchFamily="34" charset="0"/>
               </a:rPr>
-              <a:t>Ahat_gd</a:t>
+              <a:t>train_loader</a:t>
             </a:r>
             <a:r>
               <a:rPr lang="en-US" sz="1400" dirty="0">
                 <a:latin typeface="Arial" panose="020B0604020202020204" pitchFamily="34" charset="0"/>
                 <a:cs typeface="Arial" panose="020B0604020202020204" pitchFamily="34" charset="0"/>
               </a:rPr>
-              <a:t> (4017, 502)</a:t>
+              <a:t>, 4 batches of ~2000 for </a:t>
+            </a:r>
+            <a:r>
+              <a:rPr lang="en-US" sz="1400" dirty="0" err="1">
+                <a:latin typeface="Arial" panose="020B0604020202020204" pitchFamily="34" charset="0"/>
+                <a:cs typeface="Arial" panose="020B0604020202020204" pitchFamily="34" charset="0"/>
+              </a:rPr>
+              <a:t>val_loader</a:t>
+            </a:r>
+            <a:r>
+              <a:rPr lang="en-US" sz="1400" dirty="0">
+                <a:latin typeface="Arial" panose="020B0604020202020204" pitchFamily="34" charset="0"/>
+                <a:cs typeface="Arial" panose="020B0604020202020204" pitchFamily="34" charset="0"/>
+              </a:rPr>
+              <a:t> </a:t>
+            </a:r>
+            <a:r>
+              <a:rPr lang="en-US" sz="1400" dirty="0">
+                <a:latin typeface="Arial" panose="020B0604020202020204" pitchFamily="34" charset="0"/>
+                <a:cs typeface="Arial" panose="020B0604020202020204" pitchFamily="34" charset="0"/>
+                <a:sym typeface="Wingdings" panose="05000000000000000000" pitchFamily="2" charset="2"/>
+              </a:rPr>
+              <a:t> 24000~22968 training t’s, 8000~6340 test t’s</a:t>
+            </a:r>
+          </a:p>
+          <a:p>
+            <a:pPr marL="285750" indent="-285750">
+              <a:buFont typeface="Arial" panose="020B0604020202020204" pitchFamily="34" charset="0"/>
+              <a:buChar char="•"/>
+            </a:pPr>
+            <a:r>
+              <a:rPr lang="en-US" sz="1400" dirty="0">
+                <a:latin typeface="Arial" panose="020B0604020202020204" pitchFamily="34" charset="0"/>
+                <a:cs typeface="Arial" panose="020B0604020202020204" pitchFamily="34" charset="0"/>
+                <a:sym typeface="Wingdings" panose="05000000000000000000" pitchFamily="2" charset="2"/>
+              </a:rPr>
+              <a:t>Test and </a:t>
+            </a:r>
+            <a:r>
+              <a:rPr lang="en-US" sz="1400" dirty="0" err="1">
+                <a:latin typeface="Arial" panose="020B0604020202020204" pitchFamily="34" charset="0"/>
+                <a:cs typeface="Arial" panose="020B0604020202020204" pitchFamily="34" charset="0"/>
+                <a:sym typeface="Wingdings" panose="05000000000000000000" pitchFamily="2" charset="2"/>
+              </a:rPr>
+              <a:t>val</a:t>
+            </a:r>
+            <a:r>
+              <a:rPr lang="en-US" sz="1400" dirty="0">
+                <a:latin typeface="Arial" panose="020B0604020202020204" pitchFamily="34" charset="0"/>
+                <a:cs typeface="Arial" panose="020B0604020202020204" pitchFamily="34" charset="0"/>
+                <a:sym typeface="Wingdings" panose="05000000000000000000" pitchFamily="2" charset="2"/>
+              </a:rPr>
+              <a:t> MSE uses same t’s</a:t>
+            </a:r>
+          </a:p>
+          <a:p>
+            <a:pPr marL="742950" lvl="1" indent="-285750">
+              <a:buFont typeface="Courier New" panose="02070309020205020404" pitchFamily="49" charset="0"/>
+              <a:buChar char="o"/>
+            </a:pPr>
+            <a:r>
+              <a:rPr lang="en-US" sz="1400" dirty="0">
+                <a:latin typeface="Arial" panose="020B0604020202020204" pitchFamily="34" charset="0"/>
+                <a:cs typeface="Arial" panose="020B0604020202020204" pitchFamily="34" charset="0"/>
+                <a:sym typeface="Wingdings" panose="05000000000000000000" pitchFamily="2" charset="2"/>
+              </a:rPr>
+              <a:t>Train MSE is the average of 12 batches of 2000 error</a:t>
+            </a:r>
+          </a:p>
+          <a:p>
+            <a:pPr marL="742950" lvl="1" indent="-285750">
+              <a:buFont typeface="Courier New" panose="02070309020205020404" pitchFamily="49" charset="0"/>
+              <a:buChar char="o"/>
+            </a:pPr>
+            <a:r>
+              <a:rPr lang="en-US" sz="1400" dirty="0">
+                <a:latin typeface="Arial" panose="020B0604020202020204" pitchFamily="34" charset="0"/>
+                <a:cs typeface="Arial" panose="020B0604020202020204" pitchFamily="34" charset="0"/>
+                <a:sym typeface="Wingdings" panose="05000000000000000000" pitchFamily="2" charset="2"/>
+              </a:rPr>
+              <a:t>Val MSE is the average MSE of 4 batches of 2000 error</a:t>
+            </a:r>
+          </a:p>
+          <a:p>
+            <a:pPr marL="742950" lvl="1" indent="-285750">
+              <a:buFont typeface="Courier New" panose="02070309020205020404" pitchFamily="49" charset="0"/>
+              <a:buChar char="o"/>
+            </a:pPr>
+            <a:r>
+              <a:rPr lang="en-US" sz="1400" dirty="0">
+                <a:latin typeface="Arial" panose="020B0604020202020204" pitchFamily="34" charset="0"/>
+                <a:cs typeface="Arial" panose="020B0604020202020204" pitchFamily="34" charset="0"/>
+                <a:sym typeface="Wingdings" panose="05000000000000000000" pitchFamily="2" charset="2"/>
+              </a:rPr>
+              <a:t>Test MSE is the average MSE of 82 segments of uninterrupted test t’s which vary in length (66, 109 etc.)</a:t>
             </a:r>
           </a:p>
           <a:p>
@@ -5461,10 +5373,10 @@
       </p:sp>
       <p:pic>
         <p:nvPicPr>
-          <p:cNvPr id="9" name="Picture 8">
+          <p:cNvPr id="10" name="Picture 9">
             <a:extLst>
               <a:ext uri="{FF2B5EF4-FFF2-40B4-BE49-F238E27FC236}">
-                <a16:creationId xmlns:a16="http://schemas.microsoft.com/office/drawing/2014/main" id="{832AE731-628D-1D92-1AF6-9E890D96AC52}"/>
+                <a16:creationId xmlns:a16="http://schemas.microsoft.com/office/drawing/2014/main" id="{081C64A3-3F28-BC95-961B-D076AE405641}"/>
               </a:ext>
             </a:extLst>
           </p:cNvPr>
@@ -5481,8 +5393,8 @@
         </p:blipFill>
         <p:spPr>
           <a:xfrm>
-            <a:off x="656958" y="1960499"/>
-            <a:ext cx="1305107" cy="2000529"/>
+            <a:off x="5432264" y="3171562"/>
+            <a:ext cx="3305172" cy="2198323"/>
           </a:xfrm>
           <a:prstGeom prst="rect">
             <a:avLst/>
@@ -5491,10 +5403,10 @@
       </p:pic>
       <p:pic>
         <p:nvPicPr>
-          <p:cNvPr id="11" name="Picture 10">
+          <p:cNvPr id="16" name="Picture 15">
             <a:extLst>
               <a:ext uri="{FF2B5EF4-FFF2-40B4-BE49-F238E27FC236}">
-                <a16:creationId xmlns:a16="http://schemas.microsoft.com/office/drawing/2014/main" id="{211CEF0A-5CF1-2A66-A89F-2546DACEBF87}"/>
+                <a16:creationId xmlns:a16="http://schemas.microsoft.com/office/drawing/2014/main" id="{C2808A60-7522-62E8-7078-C563B6A6AC57}"/>
               </a:ext>
             </a:extLst>
           </p:cNvPr>
@@ -5511,76 +5423,8 @@
         </p:blipFill>
         <p:spPr>
           <a:xfrm>
-            <a:off x="3319733" y="648973"/>
-            <a:ext cx="5358829" cy="3312055"/>
-          </a:xfrm>
-          <a:prstGeom prst="rect">
-            <a:avLst/>
-          </a:prstGeom>
-        </p:spPr>
-      </p:pic>
-      <p:sp>
-        <p:nvSpPr>
-          <p:cNvPr id="12" name="TextBox 11">
-            <a:extLst>
-              <a:ext uri="{FF2B5EF4-FFF2-40B4-BE49-F238E27FC236}">
-                <a16:creationId xmlns:a16="http://schemas.microsoft.com/office/drawing/2014/main" id="{FC6D1283-C626-9250-F5B5-541F038ABBD0}"/>
-              </a:ext>
-            </a:extLst>
-          </p:cNvPr>
-          <p:cNvSpPr txBox="1"/>
-          <p:nvPr/>
-        </p:nvSpPr>
-        <p:spPr>
-          <a:xfrm>
-            <a:off x="145604" y="4066232"/>
-            <a:ext cx="3440077" cy="738664"/>
-          </a:xfrm>
-          <a:prstGeom prst="rect">
-            <a:avLst/>
-          </a:prstGeom>
-          <a:noFill/>
-        </p:spPr>
-        <p:txBody>
-          <a:bodyPr wrap="square" rtlCol="0">
-            <a:spAutoFit/>
-          </a:bodyPr>
-          <a:lstStyle/>
-          <a:p>
-            <a:r>
-              <a:rPr lang="en-US" sz="1400" dirty="0">
-                <a:latin typeface="Arial" panose="020B0604020202020204" pitchFamily="34" charset="0"/>
-                <a:cs typeface="Arial" panose="020B0604020202020204" pitchFamily="34" charset="0"/>
-              </a:rPr>
-              <a:t>Test MSE is basically average MSE of 82 segments of test t’s each of which are different lengths (66, 109, etc.)</a:t>
-            </a:r>
-          </a:p>
-        </p:txBody>
-      </p:sp>
-      <p:pic>
-        <p:nvPicPr>
-          <p:cNvPr id="14" name="Picture 13">
-            <a:extLst>
-              <a:ext uri="{FF2B5EF4-FFF2-40B4-BE49-F238E27FC236}">
-                <a16:creationId xmlns:a16="http://schemas.microsoft.com/office/drawing/2014/main" id="{F2D7F8F6-8501-E802-2862-BACB962CBF7B}"/>
-              </a:ext>
-            </a:extLst>
-          </p:cNvPr>
-          <p:cNvPicPr>
-            <a:picLocks noChangeAspect="1"/>
-          </p:cNvPicPr>
-          <p:nvPr/>
-        </p:nvPicPr>
-        <p:blipFill>
-          <a:blip r:embed="rId4"/>
-          <a:stretch>
-            <a:fillRect/>
-          </a:stretch>
-        </p:blipFill>
-        <p:spPr>
-          <a:xfrm>
-            <a:off x="4526844" y="4138376"/>
-            <a:ext cx="4347986" cy="2398889"/>
+            <a:off x="203984" y="3156654"/>
+            <a:ext cx="4749173" cy="1865481"/>
           </a:xfrm>
           <a:prstGeom prst="rect">
             <a:avLst/>
@@ -5590,7 +5434,7 @@
     </p:spTree>
     <p:extLst>
       <p:ext uri="{BB962C8B-B14F-4D97-AF65-F5344CB8AC3E}">
-        <p14:creationId xmlns:p14="http://schemas.microsoft.com/office/powerpoint/2010/main" val="796977765"/>
+        <p14:creationId xmlns:p14="http://schemas.microsoft.com/office/powerpoint/2010/main" val="436604750"/>
       </p:ext>
     </p:extLst>
   </p:cSld>
@@ -5617,12 +5461,101 @@
           <a:chExt cx="0" cy="0"/>
         </a:xfrm>
       </p:grpSpPr>
+      <p:sp>
+        <p:nvSpPr>
+          <p:cNvPr id="6" name="TextBox 5">
+            <a:extLst>
+              <a:ext uri="{FF2B5EF4-FFF2-40B4-BE49-F238E27FC236}">
+                <a16:creationId xmlns:a16="http://schemas.microsoft.com/office/drawing/2014/main" id="{257CBF21-DD14-664C-D524-6FF0C80C9A10}"/>
+              </a:ext>
+            </a:extLst>
+          </p:cNvPr>
+          <p:cNvSpPr txBox="1"/>
+          <p:nvPr/>
+        </p:nvSpPr>
+        <p:spPr>
+          <a:xfrm>
+            <a:off x="281758" y="320735"/>
+            <a:ext cx="5744137" cy="461665"/>
+          </a:xfrm>
+          <a:prstGeom prst="rect">
+            <a:avLst/>
+          </a:prstGeom>
+          <a:noFill/>
+        </p:spPr>
+        <p:txBody>
+          <a:bodyPr wrap="square">
+            <a:spAutoFit/>
+          </a:bodyPr>
+          <a:lstStyle/>
+          <a:p>
+            <a:r>
+              <a:rPr lang="en-US" sz="2400" b="1" dirty="0">
+                <a:latin typeface="Arial" panose="020B0604020202020204" pitchFamily="34" charset="0"/>
+                <a:cs typeface="Arial" panose="020B0604020202020204" pitchFamily="34" charset="0"/>
+              </a:rPr>
+              <a:t>Test MSE</a:t>
+            </a:r>
+          </a:p>
+        </p:txBody>
+      </p:sp>
+      <p:sp>
+        <p:nvSpPr>
+          <p:cNvPr id="7" name="TextBox 6">
+            <a:extLst>
+              <a:ext uri="{FF2B5EF4-FFF2-40B4-BE49-F238E27FC236}">
+                <a16:creationId xmlns:a16="http://schemas.microsoft.com/office/drawing/2014/main" id="{4E25EA88-E729-4826-C6DD-90454AE0ABB8}"/>
+              </a:ext>
+            </a:extLst>
+          </p:cNvPr>
+          <p:cNvSpPr txBox="1"/>
+          <p:nvPr/>
+        </p:nvSpPr>
+        <p:spPr>
+          <a:xfrm>
+            <a:off x="428978" y="1670756"/>
+            <a:ext cx="8195733" cy="523220"/>
+          </a:xfrm>
+          <a:prstGeom prst="rect">
+            <a:avLst/>
+          </a:prstGeom>
+          <a:noFill/>
+        </p:spPr>
+        <p:txBody>
+          <a:bodyPr wrap="square" rtlCol="0">
+            <a:spAutoFit/>
+          </a:bodyPr>
+          <a:lstStyle/>
+          <a:p>
+            <a:r>
+              <a:rPr lang="en-US" sz="1400" dirty="0" err="1">
+                <a:latin typeface="Arial" panose="020B0604020202020204" pitchFamily="34" charset="0"/>
+                <a:cs typeface="Arial" panose="020B0604020202020204" pitchFamily="34" charset="0"/>
+              </a:rPr>
+              <a:t>Ahat_gd</a:t>
+            </a:r>
+            <a:r>
+              <a:rPr lang="en-US" sz="1400" dirty="0">
+                <a:latin typeface="Arial" panose="020B0604020202020204" pitchFamily="34" charset="0"/>
+                <a:cs typeface="Arial" panose="020B0604020202020204" pitchFamily="34" charset="0"/>
+              </a:rPr>
+              <a:t> (4017, 502)</a:t>
+            </a:r>
+          </a:p>
+          <a:p>
+            <a:endParaRPr lang="en-US" sz="1400" dirty="0">
+              <a:latin typeface="Arial" panose="020B0604020202020204" pitchFamily="34" charset="0"/>
+              <a:cs typeface="Arial" panose="020B0604020202020204" pitchFamily="34" charset="0"/>
+            </a:endParaRPr>
+          </a:p>
+        </p:txBody>
+      </p:sp>
       <p:pic>
         <p:nvPicPr>
-          <p:cNvPr id="5" name="Picture 4">
+          <p:cNvPr id="9" name="Picture 8">
             <a:extLst>
               <a:ext uri="{FF2B5EF4-FFF2-40B4-BE49-F238E27FC236}">
-                <a16:creationId xmlns:a16="http://schemas.microsoft.com/office/drawing/2014/main" id="{924F3398-D15C-AA33-74F9-E7C2E576A231}"/>
+                <a16:creationId xmlns:a16="http://schemas.microsoft.com/office/drawing/2014/main" id="{832AE731-628D-1D92-1AF6-9E890D96AC52}"/>
               </a:ext>
             </a:extLst>
           </p:cNvPr>
@@ -5639,8 +5572,106 @@
         </p:blipFill>
         <p:spPr>
           <a:xfrm>
-            <a:off x="-201990" y="1323233"/>
-            <a:ext cx="10012902" cy="4211534"/>
+            <a:off x="656958" y="1960499"/>
+            <a:ext cx="1305107" cy="2000529"/>
+          </a:xfrm>
+          <a:prstGeom prst="rect">
+            <a:avLst/>
+          </a:prstGeom>
+        </p:spPr>
+      </p:pic>
+      <p:pic>
+        <p:nvPicPr>
+          <p:cNvPr id="11" name="Picture 10">
+            <a:extLst>
+              <a:ext uri="{FF2B5EF4-FFF2-40B4-BE49-F238E27FC236}">
+                <a16:creationId xmlns:a16="http://schemas.microsoft.com/office/drawing/2014/main" id="{211CEF0A-5CF1-2A66-A89F-2546DACEBF87}"/>
+              </a:ext>
+            </a:extLst>
+          </p:cNvPr>
+          <p:cNvPicPr>
+            <a:picLocks noChangeAspect="1"/>
+          </p:cNvPicPr>
+          <p:nvPr/>
+        </p:nvPicPr>
+        <p:blipFill>
+          <a:blip r:embed="rId3"/>
+          <a:stretch>
+            <a:fillRect/>
+          </a:stretch>
+        </p:blipFill>
+        <p:spPr>
+          <a:xfrm>
+            <a:off x="3319733" y="648973"/>
+            <a:ext cx="5358829" cy="3312055"/>
+          </a:xfrm>
+          <a:prstGeom prst="rect">
+            <a:avLst/>
+          </a:prstGeom>
+        </p:spPr>
+      </p:pic>
+      <p:sp>
+        <p:nvSpPr>
+          <p:cNvPr id="12" name="TextBox 11">
+            <a:extLst>
+              <a:ext uri="{FF2B5EF4-FFF2-40B4-BE49-F238E27FC236}">
+                <a16:creationId xmlns:a16="http://schemas.microsoft.com/office/drawing/2014/main" id="{FC6D1283-C626-9250-F5B5-541F038ABBD0}"/>
+              </a:ext>
+            </a:extLst>
+          </p:cNvPr>
+          <p:cNvSpPr txBox="1"/>
+          <p:nvPr/>
+        </p:nvSpPr>
+        <p:spPr>
+          <a:xfrm>
+            <a:off x="145604" y="4066232"/>
+            <a:ext cx="3440077" cy="738664"/>
+          </a:xfrm>
+          <a:prstGeom prst="rect">
+            <a:avLst/>
+          </a:prstGeom>
+          <a:noFill/>
+        </p:spPr>
+        <p:txBody>
+          <a:bodyPr wrap="square" rtlCol="0">
+            <a:spAutoFit/>
+          </a:bodyPr>
+          <a:lstStyle/>
+          <a:p>
+            <a:r>
+              <a:rPr lang="en-US" sz="1400" dirty="0">
+                <a:latin typeface="Arial" panose="020B0604020202020204" pitchFamily="34" charset="0"/>
+                <a:cs typeface="Arial" panose="020B0604020202020204" pitchFamily="34" charset="0"/>
+              </a:rPr>
+              <a:t>Test MSE is basically average MSE of 82 segments of test t’s each of which are different lengths (66, 109, etc.)</a:t>
+            </a:r>
+          </a:p>
+        </p:txBody>
+      </p:sp>
+      <p:pic>
+        <p:nvPicPr>
+          <p:cNvPr id="14" name="Picture 13">
+            <a:extLst>
+              <a:ext uri="{FF2B5EF4-FFF2-40B4-BE49-F238E27FC236}">
+                <a16:creationId xmlns:a16="http://schemas.microsoft.com/office/drawing/2014/main" id="{F2D7F8F6-8501-E802-2862-BACB962CBF7B}"/>
+              </a:ext>
+            </a:extLst>
+          </p:cNvPr>
+          <p:cNvPicPr>
+            <a:picLocks noChangeAspect="1"/>
+          </p:cNvPicPr>
+          <p:nvPr/>
+        </p:nvPicPr>
+        <p:blipFill>
+          <a:blip r:embed="rId4"/>
+          <a:stretch>
+            <a:fillRect/>
+          </a:stretch>
+        </p:blipFill>
+        <p:spPr>
+          <a:xfrm>
+            <a:off x="4526844" y="4138376"/>
+            <a:ext cx="4347986" cy="2398889"/>
           </a:xfrm>
           <a:prstGeom prst="rect">
             <a:avLst/>
@@ -5650,7 +5681,7 @@
     </p:spTree>
     <p:extLst>
       <p:ext uri="{BB962C8B-B14F-4D97-AF65-F5344CB8AC3E}">
-        <p14:creationId xmlns:p14="http://schemas.microsoft.com/office/powerpoint/2010/main" val="1894851846"/>
+        <p14:creationId xmlns:p14="http://schemas.microsoft.com/office/powerpoint/2010/main" val="796977765"/>
       </p:ext>
     </p:extLst>
   </p:cSld>
@@ -5677,50 +5708,12 @@
           <a:chExt cx="0" cy="0"/>
         </a:xfrm>
       </p:grpSpPr>
-      <p:sp>
-        <p:nvSpPr>
-          <p:cNvPr id="4" name="TextBox 3">
-            <a:extLst>
-              <a:ext uri="{FF2B5EF4-FFF2-40B4-BE49-F238E27FC236}">
-                <a16:creationId xmlns:a16="http://schemas.microsoft.com/office/drawing/2014/main" id="{7E32666F-91C8-1089-C0F9-732EF5BF6D8B}"/>
-              </a:ext>
-            </a:extLst>
-          </p:cNvPr>
-          <p:cNvSpPr txBox="1"/>
-          <p:nvPr/>
-        </p:nvSpPr>
-        <p:spPr>
-          <a:xfrm>
-            <a:off x="281758" y="320735"/>
-            <a:ext cx="5744137" cy="461665"/>
-          </a:xfrm>
-          <a:prstGeom prst="rect">
-            <a:avLst/>
-          </a:prstGeom>
-          <a:noFill/>
-        </p:spPr>
-        <p:txBody>
-          <a:bodyPr wrap="square">
-            <a:spAutoFit/>
-          </a:bodyPr>
-          <a:lstStyle/>
-          <a:p>
-            <a:r>
-              <a:rPr lang="en-US" sz="2400" b="1" dirty="0">
-                <a:latin typeface="Arial" panose="020B0604020202020204" pitchFamily="34" charset="0"/>
-                <a:cs typeface="Arial" panose="020B0604020202020204" pitchFamily="34" charset="0"/>
-              </a:rPr>
-              <a:t>Empty Initialization</a:t>
-            </a:r>
-          </a:p>
-        </p:txBody>
-      </p:sp>
       <p:pic>
         <p:nvPicPr>
-          <p:cNvPr id="6" name="Picture 5" descr="A graph with a green line&#10;&#10;Description automatically generated">
+          <p:cNvPr id="5" name="Picture 4">
             <a:extLst>
               <a:ext uri="{FF2B5EF4-FFF2-40B4-BE49-F238E27FC236}">
-                <a16:creationId xmlns:a16="http://schemas.microsoft.com/office/drawing/2014/main" id="{CDB51830-11CE-6DEB-5F2E-AB62E68824FD}"/>
+                <a16:creationId xmlns:a16="http://schemas.microsoft.com/office/drawing/2014/main" id="{924F3398-D15C-AA33-74F9-E7C2E576A231}"/>
               </a:ext>
             </a:extLst>
           </p:cNvPr>
@@ -5737,197 +5730,18 @@
         </p:blipFill>
         <p:spPr>
           <a:xfrm>
-            <a:off x="139585" y="3478585"/>
-            <a:ext cx="3733772" cy="1866887"/>
+            <a:off x="-201990" y="1323233"/>
+            <a:ext cx="10012902" cy="4211534"/>
           </a:xfrm>
           <a:prstGeom prst="rect">
             <a:avLst/>
           </a:prstGeom>
         </p:spPr>
       </p:pic>
-      <p:pic>
-        <p:nvPicPr>
-          <p:cNvPr id="8" name="Picture 7">
-            <a:extLst>
-              <a:ext uri="{FF2B5EF4-FFF2-40B4-BE49-F238E27FC236}">
-                <a16:creationId xmlns:a16="http://schemas.microsoft.com/office/drawing/2014/main" id="{ABE2F743-CA20-60B0-B831-96BF17271F2C}"/>
-              </a:ext>
-            </a:extLst>
-          </p:cNvPr>
-          <p:cNvPicPr>
-            <a:picLocks noChangeAspect="1"/>
-          </p:cNvPicPr>
-          <p:nvPr/>
-        </p:nvPicPr>
-        <p:blipFill>
-          <a:blip r:embed="rId3"/>
-          <a:stretch>
-            <a:fillRect/>
-          </a:stretch>
-        </p:blipFill>
-        <p:spPr>
-          <a:xfrm>
-            <a:off x="395555" y="2675340"/>
-            <a:ext cx="8352890" cy="576062"/>
-          </a:xfrm>
-          <a:prstGeom prst="rect">
-            <a:avLst/>
-          </a:prstGeom>
-        </p:spPr>
-      </p:pic>
-      <p:pic>
-        <p:nvPicPr>
-          <p:cNvPr id="10" name="Picture 9">
-            <a:extLst>
-              <a:ext uri="{FF2B5EF4-FFF2-40B4-BE49-F238E27FC236}">
-                <a16:creationId xmlns:a16="http://schemas.microsoft.com/office/drawing/2014/main" id="{590FA1C1-2EE2-3941-AB87-DD16BA424635}"/>
-              </a:ext>
-            </a:extLst>
-          </p:cNvPr>
-          <p:cNvPicPr>
-            <a:picLocks noChangeAspect="1"/>
-          </p:cNvPicPr>
-          <p:nvPr/>
-        </p:nvPicPr>
-        <p:blipFill>
-          <a:blip r:embed="rId4"/>
-          <a:stretch>
-            <a:fillRect/>
-          </a:stretch>
-        </p:blipFill>
-        <p:spPr>
-          <a:xfrm>
-            <a:off x="3637051" y="3623556"/>
-            <a:ext cx="5270643" cy="1402281"/>
-          </a:xfrm>
-          <a:prstGeom prst="rect">
-            <a:avLst/>
-          </a:prstGeom>
-        </p:spPr>
-      </p:pic>
-      <p:pic>
-        <p:nvPicPr>
-          <p:cNvPr id="14" name="Picture 13">
-            <a:extLst>
-              <a:ext uri="{FF2B5EF4-FFF2-40B4-BE49-F238E27FC236}">
-                <a16:creationId xmlns:a16="http://schemas.microsoft.com/office/drawing/2014/main" id="{7272D6FB-22A3-F078-E2BF-D0D3D95C4225}"/>
-              </a:ext>
-            </a:extLst>
-          </p:cNvPr>
-          <p:cNvPicPr>
-            <a:picLocks noChangeAspect="1"/>
-          </p:cNvPicPr>
-          <p:nvPr/>
-        </p:nvPicPr>
-        <p:blipFill>
-          <a:blip r:embed="rId5"/>
-          <a:stretch>
-            <a:fillRect/>
-          </a:stretch>
-        </p:blipFill>
-        <p:spPr>
-          <a:xfrm>
-            <a:off x="-816597" y="2515779"/>
-            <a:ext cx="10211971" cy="2602544"/>
-          </a:xfrm>
-          <a:prstGeom prst="rect">
-            <a:avLst/>
-          </a:prstGeom>
-        </p:spPr>
-      </p:pic>
-      <p:sp>
-        <p:nvSpPr>
-          <p:cNvPr id="15" name="TextBox 14">
-            <a:extLst>
-              <a:ext uri="{FF2B5EF4-FFF2-40B4-BE49-F238E27FC236}">
-                <a16:creationId xmlns:a16="http://schemas.microsoft.com/office/drawing/2014/main" id="{FB0EDE64-E061-AA44-1B33-A19D10D45102}"/>
-              </a:ext>
-            </a:extLst>
-          </p:cNvPr>
-          <p:cNvSpPr txBox="1"/>
-          <p:nvPr/>
-        </p:nvSpPr>
-        <p:spPr>
-          <a:xfrm>
-            <a:off x="395554" y="1561672"/>
-            <a:ext cx="8239093" cy="954107"/>
-          </a:xfrm>
-          <a:prstGeom prst="rect">
-            <a:avLst/>
-          </a:prstGeom>
-          <a:noFill/>
-        </p:spPr>
-        <p:txBody>
-          <a:bodyPr wrap="square" rtlCol="0">
-            <a:spAutoFit/>
-          </a:bodyPr>
-          <a:lstStyle/>
-          <a:p>
-            <a:pPr marL="171450" indent="-171450">
-              <a:buFont typeface="Arial" panose="020B0604020202020204" pitchFamily="34" charset="0"/>
-              <a:buChar char="•"/>
-            </a:pPr>
-            <a:r>
-              <a:rPr lang="en-US" sz="1400" dirty="0">
-                <a:latin typeface="Arial" panose="020B0604020202020204" pitchFamily="34" charset="0"/>
-                <a:cs typeface="Arial" panose="020B0604020202020204" pitchFamily="34" charset="0"/>
-              </a:rPr>
-              <a:t>As expected, empty initialization starts the solution off at a much higher loss, it takes much longer to get to a good solution.</a:t>
-            </a:r>
-          </a:p>
-          <a:p>
-            <a:pPr marL="171450" indent="-171450">
-              <a:buFont typeface="Arial" panose="020B0604020202020204" pitchFamily="34" charset="0"/>
-              <a:buChar char="•"/>
-            </a:pPr>
-            <a:r>
-              <a:rPr lang="en-US" sz="1400" dirty="0">
-                <a:latin typeface="Arial" panose="020B0604020202020204" pitchFamily="34" charset="0"/>
-                <a:cs typeface="Arial" panose="020B0604020202020204" pitchFamily="34" charset="0"/>
-              </a:rPr>
-              <a:t>Init_value none 1000 epochs, converges to a </a:t>
-            </a:r>
-            <a:r>
-              <a:rPr lang="en-US" sz="1400" dirty="0">
-                <a:solidFill>
-                  <a:srgbClr val="00B050"/>
-                </a:solidFill>
-                <a:latin typeface="Arial" panose="020B0604020202020204" pitchFamily="34" charset="0"/>
-                <a:cs typeface="Arial" panose="020B0604020202020204" pitchFamily="34" charset="0"/>
-              </a:rPr>
-              <a:t>really low MSE</a:t>
-            </a:r>
-            <a:r>
-              <a:rPr lang="en-US" sz="1400" dirty="0">
-                <a:latin typeface="Arial" panose="020B0604020202020204" pitchFamily="34" charset="0"/>
-                <a:cs typeface="Arial" panose="020B0604020202020204" pitchFamily="34" charset="0"/>
-              </a:rPr>
-              <a:t> but the </a:t>
-            </a:r>
-            <a:r>
-              <a:rPr lang="en-US" sz="1400" dirty="0">
-                <a:solidFill>
-                  <a:srgbClr val="C00000"/>
-                </a:solidFill>
-                <a:latin typeface="Arial" panose="020B0604020202020204" pitchFamily="34" charset="0"/>
-                <a:cs typeface="Arial" panose="020B0604020202020204" pitchFamily="34" charset="0"/>
-              </a:rPr>
-              <a:t>AUROC is so low</a:t>
-            </a:r>
-            <a:r>
-              <a:rPr lang="en-US" sz="1400" dirty="0">
-                <a:latin typeface="Arial" panose="020B0604020202020204" pitchFamily="34" charset="0"/>
-                <a:cs typeface="Arial" panose="020B0604020202020204" pitchFamily="34" charset="0"/>
-              </a:rPr>
-              <a:t>??? The MSE goes lower than that of the closed-form solution….</a:t>
-            </a:r>
-          </a:p>
-        </p:txBody>
-      </p:sp>
     </p:spTree>
     <p:extLst>
       <p:ext uri="{BB962C8B-B14F-4D97-AF65-F5344CB8AC3E}">
-        <p14:creationId xmlns:p14="http://schemas.microsoft.com/office/powerpoint/2010/main" val="3343103992"/>
+        <p14:creationId xmlns:p14="http://schemas.microsoft.com/office/powerpoint/2010/main" val="1894851846"/>
       </p:ext>
     </p:extLst>
   </p:cSld>
@@ -5956,6 +5770,283 @@
       </p:grpSpPr>
       <p:sp>
         <p:nvSpPr>
+          <p:cNvPr id="4" name="TextBox 3">
+            <a:extLst>
+              <a:ext uri="{FF2B5EF4-FFF2-40B4-BE49-F238E27FC236}">
+                <a16:creationId xmlns:a16="http://schemas.microsoft.com/office/drawing/2014/main" id="{7E32666F-91C8-1089-C0F9-732EF5BF6D8B}"/>
+              </a:ext>
+            </a:extLst>
+          </p:cNvPr>
+          <p:cNvSpPr txBox="1"/>
+          <p:nvPr/>
+        </p:nvSpPr>
+        <p:spPr>
+          <a:xfrm>
+            <a:off x="281758" y="320735"/>
+            <a:ext cx="5744137" cy="461665"/>
+          </a:xfrm>
+          <a:prstGeom prst="rect">
+            <a:avLst/>
+          </a:prstGeom>
+          <a:noFill/>
+        </p:spPr>
+        <p:txBody>
+          <a:bodyPr wrap="square">
+            <a:spAutoFit/>
+          </a:bodyPr>
+          <a:lstStyle/>
+          <a:p>
+            <a:r>
+              <a:rPr lang="en-US" sz="2400" b="1" dirty="0">
+                <a:latin typeface="Arial" panose="020B0604020202020204" pitchFamily="34" charset="0"/>
+                <a:cs typeface="Arial" panose="020B0604020202020204" pitchFamily="34" charset="0"/>
+              </a:rPr>
+              <a:t>Empty Initialization</a:t>
+            </a:r>
+          </a:p>
+        </p:txBody>
+      </p:sp>
+      <p:pic>
+        <p:nvPicPr>
+          <p:cNvPr id="6" name="Picture 5" descr="A graph with a green line&#10;&#10;Description automatically generated">
+            <a:extLst>
+              <a:ext uri="{FF2B5EF4-FFF2-40B4-BE49-F238E27FC236}">
+                <a16:creationId xmlns:a16="http://schemas.microsoft.com/office/drawing/2014/main" id="{CDB51830-11CE-6DEB-5F2E-AB62E68824FD}"/>
+              </a:ext>
+            </a:extLst>
+          </p:cNvPr>
+          <p:cNvPicPr>
+            <a:picLocks noChangeAspect="1"/>
+          </p:cNvPicPr>
+          <p:nvPr/>
+        </p:nvPicPr>
+        <p:blipFill>
+          <a:blip r:embed="rId2"/>
+          <a:stretch>
+            <a:fillRect/>
+          </a:stretch>
+        </p:blipFill>
+        <p:spPr>
+          <a:xfrm>
+            <a:off x="139585" y="3478585"/>
+            <a:ext cx="3733772" cy="1866887"/>
+          </a:xfrm>
+          <a:prstGeom prst="rect">
+            <a:avLst/>
+          </a:prstGeom>
+        </p:spPr>
+      </p:pic>
+      <p:pic>
+        <p:nvPicPr>
+          <p:cNvPr id="8" name="Picture 7">
+            <a:extLst>
+              <a:ext uri="{FF2B5EF4-FFF2-40B4-BE49-F238E27FC236}">
+                <a16:creationId xmlns:a16="http://schemas.microsoft.com/office/drawing/2014/main" id="{ABE2F743-CA20-60B0-B831-96BF17271F2C}"/>
+              </a:ext>
+            </a:extLst>
+          </p:cNvPr>
+          <p:cNvPicPr>
+            <a:picLocks noChangeAspect="1"/>
+          </p:cNvPicPr>
+          <p:nvPr/>
+        </p:nvPicPr>
+        <p:blipFill>
+          <a:blip r:embed="rId3"/>
+          <a:stretch>
+            <a:fillRect/>
+          </a:stretch>
+        </p:blipFill>
+        <p:spPr>
+          <a:xfrm>
+            <a:off x="395555" y="2675340"/>
+            <a:ext cx="8352890" cy="576062"/>
+          </a:xfrm>
+          <a:prstGeom prst="rect">
+            <a:avLst/>
+          </a:prstGeom>
+        </p:spPr>
+      </p:pic>
+      <p:pic>
+        <p:nvPicPr>
+          <p:cNvPr id="10" name="Picture 9">
+            <a:extLst>
+              <a:ext uri="{FF2B5EF4-FFF2-40B4-BE49-F238E27FC236}">
+                <a16:creationId xmlns:a16="http://schemas.microsoft.com/office/drawing/2014/main" id="{590FA1C1-2EE2-3941-AB87-DD16BA424635}"/>
+              </a:ext>
+            </a:extLst>
+          </p:cNvPr>
+          <p:cNvPicPr>
+            <a:picLocks noChangeAspect="1"/>
+          </p:cNvPicPr>
+          <p:nvPr/>
+        </p:nvPicPr>
+        <p:blipFill>
+          <a:blip r:embed="rId4"/>
+          <a:stretch>
+            <a:fillRect/>
+          </a:stretch>
+        </p:blipFill>
+        <p:spPr>
+          <a:xfrm>
+            <a:off x="3637051" y="3623556"/>
+            <a:ext cx="5270643" cy="1402281"/>
+          </a:xfrm>
+          <a:prstGeom prst="rect">
+            <a:avLst/>
+          </a:prstGeom>
+        </p:spPr>
+      </p:pic>
+      <p:pic>
+        <p:nvPicPr>
+          <p:cNvPr id="14" name="Picture 13">
+            <a:extLst>
+              <a:ext uri="{FF2B5EF4-FFF2-40B4-BE49-F238E27FC236}">
+                <a16:creationId xmlns:a16="http://schemas.microsoft.com/office/drawing/2014/main" id="{7272D6FB-22A3-F078-E2BF-D0D3D95C4225}"/>
+              </a:ext>
+            </a:extLst>
+          </p:cNvPr>
+          <p:cNvPicPr>
+            <a:picLocks noChangeAspect="1"/>
+          </p:cNvPicPr>
+          <p:nvPr/>
+        </p:nvPicPr>
+        <p:blipFill>
+          <a:blip r:embed="rId5"/>
+          <a:stretch>
+            <a:fillRect/>
+          </a:stretch>
+        </p:blipFill>
+        <p:spPr>
+          <a:xfrm>
+            <a:off x="-816597" y="2515779"/>
+            <a:ext cx="10211971" cy="2602544"/>
+          </a:xfrm>
+          <a:prstGeom prst="rect">
+            <a:avLst/>
+          </a:prstGeom>
+        </p:spPr>
+      </p:pic>
+      <p:sp>
+        <p:nvSpPr>
+          <p:cNvPr id="15" name="TextBox 14">
+            <a:extLst>
+              <a:ext uri="{FF2B5EF4-FFF2-40B4-BE49-F238E27FC236}">
+                <a16:creationId xmlns:a16="http://schemas.microsoft.com/office/drawing/2014/main" id="{FB0EDE64-E061-AA44-1B33-A19D10D45102}"/>
+              </a:ext>
+            </a:extLst>
+          </p:cNvPr>
+          <p:cNvSpPr txBox="1"/>
+          <p:nvPr/>
+        </p:nvSpPr>
+        <p:spPr>
+          <a:xfrm>
+            <a:off x="395554" y="1561672"/>
+            <a:ext cx="8239093" cy="954107"/>
+          </a:xfrm>
+          <a:prstGeom prst="rect">
+            <a:avLst/>
+          </a:prstGeom>
+          <a:noFill/>
+        </p:spPr>
+        <p:txBody>
+          <a:bodyPr wrap="square" rtlCol="0">
+            <a:spAutoFit/>
+          </a:bodyPr>
+          <a:lstStyle/>
+          <a:p>
+            <a:pPr marL="171450" indent="-171450">
+              <a:buFont typeface="Arial" panose="020B0604020202020204" pitchFamily="34" charset="0"/>
+              <a:buChar char="•"/>
+            </a:pPr>
+            <a:r>
+              <a:rPr lang="en-US" sz="1400" dirty="0">
+                <a:latin typeface="Arial" panose="020B0604020202020204" pitchFamily="34" charset="0"/>
+                <a:cs typeface="Arial" panose="020B0604020202020204" pitchFamily="34" charset="0"/>
+              </a:rPr>
+              <a:t>As expected, empty initialization starts the solution off at a much higher loss, it takes much longer to get to a good solution.</a:t>
+            </a:r>
+          </a:p>
+          <a:p>
+            <a:pPr marL="171450" indent="-171450">
+              <a:buFont typeface="Arial" panose="020B0604020202020204" pitchFamily="34" charset="0"/>
+              <a:buChar char="•"/>
+            </a:pPr>
+            <a:r>
+              <a:rPr lang="en-US" sz="1400" dirty="0">
+                <a:latin typeface="Arial" panose="020B0604020202020204" pitchFamily="34" charset="0"/>
+                <a:cs typeface="Arial" panose="020B0604020202020204" pitchFamily="34" charset="0"/>
+              </a:rPr>
+              <a:t>Init_value none 1000 epochs, converges to a </a:t>
+            </a:r>
+            <a:r>
+              <a:rPr lang="en-US" sz="1400" dirty="0">
+                <a:solidFill>
+                  <a:srgbClr val="00B050"/>
+                </a:solidFill>
+                <a:latin typeface="Arial" panose="020B0604020202020204" pitchFamily="34" charset="0"/>
+                <a:cs typeface="Arial" panose="020B0604020202020204" pitchFamily="34" charset="0"/>
+              </a:rPr>
+              <a:t>really low MSE</a:t>
+            </a:r>
+            <a:r>
+              <a:rPr lang="en-US" sz="1400" dirty="0">
+                <a:latin typeface="Arial" panose="020B0604020202020204" pitchFamily="34" charset="0"/>
+                <a:cs typeface="Arial" panose="020B0604020202020204" pitchFamily="34" charset="0"/>
+              </a:rPr>
+              <a:t> but the </a:t>
+            </a:r>
+            <a:r>
+              <a:rPr lang="en-US" sz="1400" dirty="0">
+                <a:solidFill>
+                  <a:srgbClr val="C00000"/>
+                </a:solidFill>
+                <a:latin typeface="Arial" panose="020B0604020202020204" pitchFamily="34" charset="0"/>
+                <a:cs typeface="Arial" panose="020B0604020202020204" pitchFamily="34" charset="0"/>
+              </a:rPr>
+              <a:t>AUROC is so low</a:t>
+            </a:r>
+            <a:r>
+              <a:rPr lang="en-US" sz="1400" dirty="0">
+                <a:latin typeface="Arial" panose="020B0604020202020204" pitchFamily="34" charset="0"/>
+                <a:cs typeface="Arial" panose="020B0604020202020204" pitchFamily="34" charset="0"/>
+              </a:rPr>
+              <a:t>??? The MSE goes lower than that of the closed-form solution….</a:t>
+            </a:r>
+          </a:p>
+        </p:txBody>
+      </p:sp>
+    </p:spTree>
+    <p:extLst>
+      <p:ext uri="{BB962C8B-B14F-4D97-AF65-F5344CB8AC3E}">
+        <p14:creationId xmlns:p14="http://schemas.microsoft.com/office/powerpoint/2010/main" val="3343103992"/>
+      </p:ext>
+    </p:extLst>
+  </p:cSld>
+  <p:clrMapOvr>
+    <a:masterClrMapping/>
+  </p:clrMapOvr>
+</p:sld>
+</file>
+
+<file path=ppt/slides/slide26.xml><?xml version="1.0" encoding="utf-8"?>
+<p:sld xmlns:a="http://schemas.openxmlformats.org/drawingml/2006/main" xmlns:r="http://schemas.openxmlformats.org/officeDocument/2006/relationships" xmlns:p="http://schemas.openxmlformats.org/presentationml/2006/main">
+  <p:cSld>
+    <p:spTree>
+      <p:nvGrpSpPr>
+        <p:cNvPr id="1" name=""/>
+        <p:cNvGrpSpPr/>
+        <p:nvPr/>
+      </p:nvGrpSpPr>
+      <p:grpSpPr>
+        <a:xfrm>
+          <a:off x="0" y="0"/>
+          <a:ext cx="0" cy="0"/>
+          <a:chOff x="0" y="0"/>
+          <a:chExt cx="0" cy="0"/>
+        </a:xfrm>
+      </p:grpSpPr>
+      <p:sp>
+        <p:nvSpPr>
           <p:cNvPr id="7" name="TextBox 6">
             <a:extLst>
               <a:ext uri="{FF2B5EF4-FFF2-40B4-BE49-F238E27FC236}">
@@ -6060,7 +6151,7 @@
 </p:sld>
 </file>
 
-<file path=ppt/slides/slide26.xml><?xml version="1.0" encoding="utf-8"?>
+<file path=ppt/slides/slide27.xml><?xml version="1.0" encoding="utf-8"?>
 <p:sld xmlns:a="http://schemas.openxmlformats.org/drawingml/2006/main" xmlns:r="http://schemas.openxmlformats.org/officeDocument/2006/relationships" xmlns:p="http://schemas.openxmlformats.org/presentationml/2006/main">
   <p:cSld>
     <p:spTree>
@@ -6185,7 +6276,7 @@
 </p:sld>
 </file>
 
-<file path=ppt/slides/slide27.xml><?xml version="1.0" encoding="utf-8"?>
+<file path=ppt/slides/slide28.xml><?xml version="1.0" encoding="utf-8"?>
 <p:sld xmlns:a="http://schemas.openxmlformats.org/drawingml/2006/main" xmlns:r="http://schemas.openxmlformats.org/officeDocument/2006/relationships" xmlns:p="http://schemas.openxmlformats.org/presentationml/2006/main">
   <p:cSld>
     <p:spTree>
@@ -6458,126 +6549,6 @@
     <p:extLst>
       <p:ext uri="{BB962C8B-B14F-4D97-AF65-F5344CB8AC3E}">
         <p14:creationId xmlns:p14="http://schemas.microsoft.com/office/powerpoint/2010/main" val="3287328924"/>
-      </p:ext>
-    </p:extLst>
-  </p:cSld>
-  <p:clrMapOvr>
-    <a:masterClrMapping/>
-  </p:clrMapOvr>
-</p:sld>
-</file>
-
-<file path=ppt/slides/slide28.xml><?xml version="1.0" encoding="utf-8"?>
-<p:sld xmlns:a="http://schemas.openxmlformats.org/drawingml/2006/main" xmlns:r="http://schemas.openxmlformats.org/officeDocument/2006/relationships" xmlns:p="http://schemas.openxmlformats.org/presentationml/2006/main">
-  <p:cSld>
-    <p:spTree>
-      <p:nvGrpSpPr>
-        <p:cNvPr id="1" name=""/>
-        <p:cNvGrpSpPr/>
-        <p:nvPr/>
-      </p:nvGrpSpPr>
-      <p:grpSpPr>
-        <a:xfrm>
-          <a:off x="0" y="0"/>
-          <a:ext cx="0" cy="0"/>
-          <a:chOff x="0" y="0"/>
-          <a:chExt cx="0" cy="0"/>
-        </a:xfrm>
-      </p:grpSpPr>
-      <p:pic>
-        <p:nvPicPr>
-          <p:cNvPr id="4" name="Picture 3">
-            <a:extLst>
-              <a:ext uri="{FF2B5EF4-FFF2-40B4-BE49-F238E27FC236}">
-                <a16:creationId xmlns:a16="http://schemas.microsoft.com/office/drawing/2014/main" id="{8D88C30E-59D9-5AFD-4154-0E964BD0320E}"/>
-              </a:ext>
-            </a:extLst>
-          </p:cNvPr>
-          <p:cNvPicPr>
-            <a:picLocks noChangeAspect="1"/>
-          </p:cNvPicPr>
-          <p:nvPr/>
-        </p:nvPicPr>
-        <p:blipFill>
-          <a:blip r:embed="rId2"/>
-          <a:stretch>
-            <a:fillRect/>
-          </a:stretch>
-        </p:blipFill>
-        <p:spPr>
-          <a:xfrm>
-            <a:off x="83820" y="0"/>
-            <a:ext cx="5082539" cy="2664866"/>
-          </a:xfrm>
-          <a:prstGeom prst="rect">
-            <a:avLst/>
-          </a:prstGeom>
-        </p:spPr>
-      </p:pic>
-      <p:pic>
-        <p:nvPicPr>
-          <p:cNvPr id="6" name="Picture 5">
-            <a:extLst>
-              <a:ext uri="{FF2B5EF4-FFF2-40B4-BE49-F238E27FC236}">
-                <a16:creationId xmlns:a16="http://schemas.microsoft.com/office/drawing/2014/main" id="{30252F16-7AD9-B6F2-CC7C-AFD5B31FFBD6}"/>
-              </a:ext>
-            </a:extLst>
-          </p:cNvPr>
-          <p:cNvPicPr>
-            <a:picLocks noChangeAspect="1"/>
-          </p:cNvPicPr>
-          <p:nvPr/>
-        </p:nvPicPr>
-        <p:blipFill>
-          <a:blip r:embed="rId3"/>
-          <a:stretch>
-            <a:fillRect/>
-          </a:stretch>
-        </p:blipFill>
-        <p:spPr>
-          <a:xfrm>
-            <a:off x="150981" y="1332433"/>
-            <a:ext cx="5100823" cy="2664866"/>
-          </a:xfrm>
-          <a:prstGeom prst="rect">
-            <a:avLst/>
-          </a:prstGeom>
-        </p:spPr>
-      </p:pic>
-      <p:pic>
-        <p:nvPicPr>
-          <p:cNvPr id="5" name="Picture 4">
-            <a:extLst>
-              <a:ext uri="{FF2B5EF4-FFF2-40B4-BE49-F238E27FC236}">
-                <a16:creationId xmlns:a16="http://schemas.microsoft.com/office/drawing/2014/main" id="{BA803C8D-5065-44C1-C3C6-9F700979D857}"/>
-              </a:ext>
-            </a:extLst>
-          </p:cNvPr>
-          <p:cNvPicPr>
-            <a:picLocks noChangeAspect="1"/>
-          </p:cNvPicPr>
-          <p:nvPr/>
-        </p:nvPicPr>
-        <p:blipFill>
-          <a:blip r:embed="rId4"/>
-          <a:stretch>
-            <a:fillRect/>
-          </a:stretch>
-        </p:blipFill>
-        <p:spPr>
-          <a:xfrm>
-            <a:off x="150981" y="2597168"/>
-            <a:ext cx="5210032" cy="2732564"/>
-          </a:xfrm>
-          <a:prstGeom prst="rect">
-            <a:avLst/>
-          </a:prstGeom>
-        </p:spPr>
-      </p:pic>
-    </p:spTree>
-    <p:extLst>
-      <p:ext uri="{BB962C8B-B14F-4D97-AF65-F5344CB8AC3E}">
-        <p14:creationId xmlns:p14="http://schemas.microsoft.com/office/powerpoint/2010/main" val="1848778735"/>
       </p:ext>
     </p:extLst>
   </p:cSld>
@@ -6604,10 +6575,100 @@
           <a:chExt cx="0" cy="0"/>
         </a:xfrm>
       </p:grpSpPr>
+      <p:pic>
+        <p:nvPicPr>
+          <p:cNvPr id="4" name="Picture 3">
+            <a:extLst>
+              <a:ext uri="{FF2B5EF4-FFF2-40B4-BE49-F238E27FC236}">
+                <a16:creationId xmlns:a16="http://schemas.microsoft.com/office/drawing/2014/main" id="{8D88C30E-59D9-5AFD-4154-0E964BD0320E}"/>
+              </a:ext>
+            </a:extLst>
+          </p:cNvPr>
+          <p:cNvPicPr>
+            <a:picLocks noChangeAspect="1"/>
+          </p:cNvPicPr>
+          <p:nvPr/>
+        </p:nvPicPr>
+        <p:blipFill>
+          <a:blip r:embed="rId2"/>
+          <a:stretch>
+            <a:fillRect/>
+          </a:stretch>
+        </p:blipFill>
+        <p:spPr>
+          <a:xfrm>
+            <a:off x="83820" y="0"/>
+            <a:ext cx="5082539" cy="2664866"/>
+          </a:xfrm>
+          <a:prstGeom prst="rect">
+            <a:avLst/>
+          </a:prstGeom>
+        </p:spPr>
+      </p:pic>
+      <p:pic>
+        <p:nvPicPr>
+          <p:cNvPr id="6" name="Picture 5">
+            <a:extLst>
+              <a:ext uri="{FF2B5EF4-FFF2-40B4-BE49-F238E27FC236}">
+                <a16:creationId xmlns:a16="http://schemas.microsoft.com/office/drawing/2014/main" id="{30252F16-7AD9-B6F2-CC7C-AFD5B31FFBD6}"/>
+              </a:ext>
+            </a:extLst>
+          </p:cNvPr>
+          <p:cNvPicPr>
+            <a:picLocks noChangeAspect="1"/>
+          </p:cNvPicPr>
+          <p:nvPr/>
+        </p:nvPicPr>
+        <p:blipFill>
+          <a:blip r:embed="rId3"/>
+          <a:stretch>
+            <a:fillRect/>
+          </a:stretch>
+        </p:blipFill>
+        <p:spPr>
+          <a:xfrm>
+            <a:off x="150981" y="1332433"/>
+            <a:ext cx="5100823" cy="2664866"/>
+          </a:xfrm>
+          <a:prstGeom prst="rect">
+            <a:avLst/>
+          </a:prstGeom>
+        </p:spPr>
+      </p:pic>
+      <p:pic>
+        <p:nvPicPr>
+          <p:cNvPr id="5" name="Picture 4">
+            <a:extLst>
+              <a:ext uri="{FF2B5EF4-FFF2-40B4-BE49-F238E27FC236}">
+                <a16:creationId xmlns:a16="http://schemas.microsoft.com/office/drawing/2014/main" id="{BA803C8D-5065-44C1-C3C6-9F700979D857}"/>
+              </a:ext>
+            </a:extLst>
+          </p:cNvPr>
+          <p:cNvPicPr>
+            <a:picLocks noChangeAspect="1"/>
+          </p:cNvPicPr>
+          <p:nvPr/>
+        </p:nvPicPr>
+        <p:blipFill>
+          <a:blip r:embed="rId4"/>
+          <a:stretch>
+            <a:fillRect/>
+          </a:stretch>
+        </p:blipFill>
+        <p:spPr>
+          <a:xfrm>
+            <a:off x="150981" y="2597168"/>
+            <a:ext cx="5210032" cy="2732564"/>
+          </a:xfrm>
+          <a:prstGeom prst="rect">
+            <a:avLst/>
+          </a:prstGeom>
+        </p:spPr>
+      </p:pic>
     </p:spTree>
     <p:extLst>
       <p:ext uri="{BB962C8B-B14F-4D97-AF65-F5344CB8AC3E}">
-        <p14:creationId xmlns:p14="http://schemas.microsoft.com/office/powerpoint/2010/main" val="1206496682"/>
+        <p14:creationId xmlns:p14="http://schemas.microsoft.com/office/powerpoint/2010/main" val="1848778735"/>
       </p:ext>
     </p:extLst>
   </p:cSld>
@@ -6783,6 +6844,36 @@
     <p:extLst>
       <p:ext uri="{BB962C8B-B14F-4D97-AF65-F5344CB8AC3E}">
         <p14:creationId xmlns:p14="http://schemas.microsoft.com/office/powerpoint/2010/main" val="289097830"/>
+      </p:ext>
+    </p:extLst>
+  </p:cSld>
+  <p:clrMapOvr>
+    <a:masterClrMapping/>
+  </p:clrMapOvr>
+</p:sld>
+</file>
+
+<file path=ppt/slides/slide30.xml><?xml version="1.0" encoding="utf-8"?>
+<p:sld xmlns:a="http://schemas.openxmlformats.org/drawingml/2006/main" xmlns:r="http://schemas.openxmlformats.org/officeDocument/2006/relationships" xmlns:p="http://schemas.openxmlformats.org/presentationml/2006/main">
+  <p:cSld>
+    <p:spTree>
+      <p:nvGrpSpPr>
+        <p:cNvPr id="1" name=""/>
+        <p:cNvGrpSpPr/>
+        <p:nvPr/>
+      </p:nvGrpSpPr>
+      <p:grpSpPr>
+        <a:xfrm>
+          <a:off x="0" y="0"/>
+          <a:ext cx="0" cy="0"/>
+          <a:chOff x="0" y="0"/>
+          <a:chExt cx="0" cy="0"/>
+        </a:xfrm>
+      </p:grpSpPr>
+    </p:spTree>
+    <p:extLst>
+      <p:ext uri="{BB962C8B-B14F-4D97-AF65-F5344CB8AC3E}">
+        <p14:creationId xmlns:p14="http://schemas.microsoft.com/office/powerpoint/2010/main" val="1206496682"/>
       </p:ext>
     </p:extLst>
   </p:cSld>
@@ -7366,6 +7457,92 @@
           </a:prstGeom>
         </p:spPr>
       </p:pic>
+      <p:sp>
+        <p:nvSpPr>
+          <p:cNvPr id="5" name="TextBox 4">
+            <a:extLst>
+              <a:ext uri="{FF2B5EF4-FFF2-40B4-BE49-F238E27FC236}">
+                <a16:creationId xmlns:a16="http://schemas.microsoft.com/office/drawing/2014/main" id="{D961E002-82CF-A432-BC9A-D30B329F0657}"/>
+              </a:ext>
+            </a:extLst>
+          </p:cNvPr>
+          <p:cNvSpPr txBox="1"/>
+          <p:nvPr/>
+        </p:nvSpPr>
+        <p:spPr>
+          <a:xfrm>
+            <a:off x="3095515" y="3806233"/>
+            <a:ext cx="4572000" cy="1200329"/>
+          </a:xfrm>
+          <a:prstGeom prst="rect">
+            <a:avLst/>
+          </a:prstGeom>
+          <a:noFill/>
+        </p:spPr>
+        <p:txBody>
+          <a:bodyPr wrap="square">
+            <a:spAutoFit/>
+          </a:bodyPr>
+          <a:lstStyle/>
+          <a:p>
+            <a:r>
+              <a:rPr lang="en-US" sz="1200" dirty="0">
+                <a:latin typeface="Arial" panose="020B0604020202020204" pitchFamily="34" charset="0"/>
+                <a:cs typeface="Arial" panose="020B0604020202020204" pitchFamily="34" charset="0"/>
+              </a:rPr>
+              <a:t>Closed-Form                MSE: 0.000220</a:t>
+            </a:r>
+          </a:p>
+          <a:p>
+            <a:r>
+              <a:rPr lang="en-US" sz="1200" dirty="0">
+                <a:latin typeface="Arial" panose="020B0604020202020204" pitchFamily="34" charset="0"/>
+                <a:cs typeface="Arial" panose="020B0604020202020204" pitchFamily="34" charset="0"/>
+              </a:rPr>
+              <a:t>Full Rank lambda 0      MSE: 0.000322</a:t>
+            </a:r>
+          </a:p>
+          <a:p>
+            <a:r>
+              <a:rPr lang="en-US" sz="1200" dirty="0">
+                <a:latin typeface="Arial" panose="020B0604020202020204" pitchFamily="34" charset="0"/>
+                <a:cs typeface="Arial" panose="020B0604020202020204" pitchFamily="34" charset="0"/>
+              </a:rPr>
+              <a:t>Full Rank lambda 1e-7 MSE: 0.000504</a:t>
+            </a:r>
+          </a:p>
+          <a:p>
+            <a:r>
+              <a:rPr lang="en-US" sz="1200" dirty="0">
+                <a:highlight>
+                  <a:srgbClr val="00FF00"/>
+                </a:highlight>
+                <a:latin typeface="Arial" panose="020B0604020202020204" pitchFamily="34" charset="0"/>
+                <a:cs typeface="Arial" panose="020B0604020202020204" pitchFamily="34" charset="0"/>
+              </a:rPr>
+              <a:t>Full Rank lambda 1e-6 MSE: 0.000264</a:t>
+            </a:r>
+          </a:p>
+          <a:p>
+            <a:r>
+              <a:rPr lang="en-US" sz="1200" dirty="0">
+                <a:latin typeface="Arial" panose="020B0604020202020204" pitchFamily="34" charset="0"/>
+                <a:cs typeface="Arial" panose="020B0604020202020204" pitchFamily="34" charset="0"/>
+              </a:rPr>
+              <a:t>Full Rank lambda 1e-5 MSE: 0.000268</a:t>
+            </a:r>
+          </a:p>
+          <a:p>
+            <a:r>
+              <a:rPr lang="en-US" sz="1200" dirty="0">
+                <a:latin typeface="Arial" panose="020B0604020202020204" pitchFamily="34" charset="0"/>
+                <a:cs typeface="Arial" panose="020B0604020202020204" pitchFamily="34" charset="0"/>
+              </a:rPr>
+              <a:t>Full Rank lambda 1e-4 MSE: 0.000395</a:t>
+            </a:r>
+          </a:p>
+        </p:txBody>
+      </p:sp>
     </p:spTree>
     <p:extLst>
       <p:ext uri="{BB962C8B-B14F-4D97-AF65-F5344CB8AC3E}">
@@ -7396,70 +7573,167 @@
           <a:chExt cx="0" cy="0"/>
         </a:xfrm>
       </p:grpSpPr>
-      <p:pic>
-        <p:nvPicPr>
-          <p:cNvPr id="3" name="Picture 2">
+      <p:sp>
+        <p:nvSpPr>
+          <p:cNvPr id="5" name="TextBox 4">
             <a:extLst>
               <a:ext uri="{FF2B5EF4-FFF2-40B4-BE49-F238E27FC236}">
-                <a16:creationId xmlns:a16="http://schemas.microsoft.com/office/drawing/2014/main" id="{02CF9DB0-0C13-FB4C-1B37-D03AE33C6846}"/>
+                <a16:creationId xmlns:a16="http://schemas.microsoft.com/office/drawing/2014/main" id="{A594B629-EB0A-8845-4BA5-18713EB35879}"/>
               </a:ext>
             </a:extLst>
           </p:cNvPr>
-          <p:cNvPicPr>
-            <a:picLocks noChangeAspect="1"/>
-          </p:cNvPicPr>
+          <p:cNvSpPr txBox="1"/>
           <p:nvPr/>
-        </p:nvPicPr>
-        <p:blipFill>
-          <a:blip r:embed="rId2"/>
-          <a:stretch>
-            <a:fillRect/>
-          </a:stretch>
-        </p:blipFill>
-        <p:spPr>
-          <a:xfrm>
-            <a:off x="128016" y="264461"/>
-            <a:ext cx="6346469" cy="3237691"/>
-          </a:xfrm>
-          <a:prstGeom prst="rect">
-            <a:avLst/>
-          </a:prstGeom>
-        </p:spPr>
-      </p:pic>
-      <p:pic>
-        <p:nvPicPr>
-          <p:cNvPr id="5" name="Picture 4">
-            <a:extLst>
-              <a:ext uri="{FF2B5EF4-FFF2-40B4-BE49-F238E27FC236}">
-                <a16:creationId xmlns:a16="http://schemas.microsoft.com/office/drawing/2014/main" id="{B78554F3-89FB-B685-92A2-7DC8735E5541}"/>
-              </a:ext>
-            </a:extLst>
-          </p:cNvPr>
-          <p:cNvPicPr>
-            <a:picLocks noChangeAspect="1"/>
-          </p:cNvPicPr>
-          <p:nvPr/>
-        </p:nvPicPr>
-        <p:blipFill>
-          <a:blip r:embed="rId3"/>
-          <a:stretch>
-            <a:fillRect/>
-          </a:stretch>
-        </p:blipFill>
-        <p:spPr>
-          <a:xfrm>
-            <a:off x="466344" y="3502152"/>
-            <a:ext cx="5925312" cy="3245277"/>
-          </a:xfrm>
-          <a:prstGeom prst="rect">
-            <a:avLst/>
-          </a:prstGeom>
-        </p:spPr>
-      </p:pic>
+        </p:nvSpPr>
+        <p:spPr>
+          <a:xfrm>
+            <a:off x="2286000" y="2278632"/>
+            <a:ext cx="4572000" cy="3323987"/>
+          </a:xfrm>
+          <a:prstGeom prst="rect">
+            <a:avLst/>
+          </a:prstGeom>
+          <a:noFill/>
+        </p:spPr>
+        <p:txBody>
+          <a:bodyPr wrap="square">
+            <a:spAutoFit/>
+          </a:bodyPr>
+          <a:lstStyle/>
+          <a:p>
+            <a:r>
+              <a:rPr lang="en-US" sz="1600" dirty="0">
+                <a:latin typeface="Arial" panose="020B0604020202020204" pitchFamily="34" charset="0"/>
+                <a:cs typeface="Arial" panose="020B0604020202020204" pitchFamily="34" charset="0"/>
+              </a:rPr>
+              <a:t>Closed-Form                		MSE: 0.000220</a:t>
+            </a:r>
+          </a:p>
+          <a:p>
+            <a:endParaRPr lang="en-US" sz="1600" dirty="0">
+              <a:latin typeface="Arial" panose="020B0604020202020204" pitchFamily="34" charset="0"/>
+              <a:cs typeface="Arial" panose="020B0604020202020204" pitchFamily="34" charset="0"/>
+            </a:endParaRPr>
+          </a:p>
+          <a:p>
+            <a:r>
+              <a:rPr lang="en-US" sz="1600" dirty="0">
+                <a:latin typeface="Arial" panose="020B0604020202020204" pitchFamily="34" charset="0"/>
+                <a:cs typeface="Arial" panose="020B0604020202020204" pitchFamily="34" charset="0"/>
+              </a:rPr>
+              <a:t>Full Rank lambda 0      		MSE: 0.000322</a:t>
+            </a:r>
+          </a:p>
+          <a:p>
+            <a:r>
+              <a:rPr lang="en-US" sz="1600" dirty="0">
+                <a:latin typeface="Arial" panose="020B0604020202020204" pitchFamily="34" charset="0"/>
+                <a:cs typeface="Arial" panose="020B0604020202020204" pitchFamily="34" charset="0"/>
+              </a:rPr>
+              <a:t>Full Rank lambda 1e-7 		MSE: 0.000504</a:t>
+            </a:r>
+          </a:p>
+          <a:p>
+            <a:r>
+              <a:rPr lang="en-US" sz="1600" dirty="0">
+                <a:latin typeface="Arial" panose="020B0604020202020204" pitchFamily="34" charset="0"/>
+                <a:cs typeface="Arial" panose="020B0604020202020204" pitchFamily="34" charset="0"/>
+              </a:rPr>
+              <a:t>Full Rank lambda 1e-6 		MSE: 0.000264</a:t>
+            </a:r>
+          </a:p>
+          <a:p>
+            <a:r>
+              <a:rPr lang="en-US" sz="1600" dirty="0">
+                <a:latin typeface="Arial" panose="020B0604020202020204" pitchFamily="34" charset="0"/>
+                <a:cs typeface="Arial" panose="020B0604020202020204" pitchFamily="34" charset="0"/>
+              </a:rPr>
+              <a:t>Full Rank lambda 1e-5 		MSE: 0.000268</a:t>
+            </a:r>
+          </a:p>
+          <a:p>
+            <a:r>
+              <a:rPr lang="en-US" sz="1600" dirty="0">
+                <a:latin typeface="Arial" panose="020B0604020202020204" pitchFamily="34" charset="0"/>
+                <a:cs typeface="Arial" panose="020B0604020202020204" pitchFamily="34" charset="0"/>
+              </a:rPr>
+              <a:t>Full Rank lambda 1e-4 		MSE: 0.000395</a:t>
+            </a:r>
+          </a:p>
+          <a:p>
+            <a:endParaRPr lang="en-US" sz="1600" dirty="0">
+              <a:latin typeface="Arial" panose="020B0604020202020204" pitchFamily="34" charset="0"/>
+              <a:cs typeface="Arial" panose="020B0604020202020204" pitchFamily="34" charset="0"/>
+            </a:endParaRPr>
+          </a:p>
+          <a:p>
+            <a:r>
+              <a:rPr lang="en-US" sz="1600" dirty="0">
+                <a:latin typeface="Arial" panose="020B0604020202020204" pitchFamily="34" charset="0"/>
+                <a:cs typeface="Arial" panose="020B0604020202020204" pitchFamily="34" charset="0"/>
+              </a:rPr>
+              <a:t>Low Rank 35 lambda 0      	MSE: 0.000552</a:t>
+            </a:r>
+          </a:p>
+          <a:p>
+            <a:r>
+              <a:rPr lang="en-US" sz="1600" dirty="0">
+                <a:latin typeface="Arial" panose="020B0604020202020204" pitchFamily="34" charset="0"/>
+                <a:cs typeface="Arial" panose="020B0604020202020204" pitchFamily="34" charset="0"/>
+              </a:rPr>
+              <a:t>Low Rank 35 lambda 1e-7 	MSE: 0.000343</a:t>
+            </a:r>
+          </a:p>
+          <a:p>
+            <a:r>
+              <a:rPr lang="en-US" sz="1600" dirty="0">
+                <a:highlight>
+                  <a:srgbClr val="00FF00"/>
+                </a:highlight>
+                <a:latin typeface="Arial" panose="020B0604020202020204" pitchFamily="34" charset="0"/>
+                <a:cs typeface="Arial" panose="020B0604020202020204" pitchFamily="34" charset="0"/>
+              </a:rPr>
+              <a:t>Low Rank 35 lambda 1e-6</a:t>
+            </a:r>
+            <a:r>
+              <a:rPr lang="en-US" sz="1600" dirty="0">
+                <a:latin typeface="Arial" panose="020B0604020202020204" pitchFamily="34" charset="0"/>
+                <a:cs typeface="Arial" panose="020B0604020202020204" pitchFamily="34" charset="0"/>
+              </a:rPr>
+              <a:t> 	</a:t>
+            </a:r>
+            <a:r>
+              <a:rPr lang="en-US" sz="1600" dirty="0">
+                <a:highlight>
+                  <a:srgbClr val="00FF00"/>
+                </a:highlight>
+                <a:latin typeface="Arial" panose="020B0604020202020204" pitchFamily="34" charset="0"/>
+                <a:cs typeface="Arial" panose="020B0604020202020204" pitchFamily="34" charset="0"/>
+              </a:rPr>
+              <a:t>MSE: 0.000241</a:t>
+            </a:r>
+          </a:p>
+          <a:p>
+            <a:r>
+              <a:rPr lang="en-US" sz="1600" dirty="0">
+                <a:latin typeface="Arial" panose="020B0604020202020204" pitchFamily="34" charset="0"/>
+                <a:cs typeface="Arial" panose="020B0604020202020204" pitchFamily="34" charset="0"/>
+              </a:rPr>
+              <a:t>Low Rank 35 lambda 1e-5 	MSE: 0.000266</a:t>
+            </a:r>
+          </a:p>
+          <a:p>
+            <a:endParaRPr lang="en-US" sz="1800" dirty="0">
+              <a:latin typeface="Arial" panose="020B0604020202020204" pitchFamily="34" charset="0"/>
+              <a:cs typeface="Arial" panose="020B0604020202020204" pitchFamily="34" charset="0"/>
+            </a:endParaRPr>
+          </a:p>
+        </p:txBody>
+      </p:sp>
     </p:spTree>
     <p:extLst>
       <p:ext uri="{BB962C8B-B14F-4D97-AF65-F5344CB8AC3E}">
-        <p14:creationId xmlns:p14="http://schemas.microsoft.com/office/powerpoint/2010/main" val="2810709927"/>
+        <p14:creationId xmlns:p14="http://schemas.microsoft.com/office/powerpoint/2010/main" val="1512492538"/>
       </p:ext>
     </p:extLst>
   </p:cSld>
